--- a/output/figures/Fig1B_source.pptx
+++ b/output/figures/Fig1B_source.pptx
@@ -5634,7 +5634,7 @@
           </p:nvSpPr>
           <p:spPr>
             <a:xfrm>
-              <a:off x="12514327" y="11997190"/>
+              <a:off x="12528330" y="11997190"/>
               <a:ext cx="59480" cy="59480"/>
             </a:xfrm>
             <a:prstGeom prst="ellipse">
@@ -5669,7 +5669,7 @@
           </p:nvSpPr>
           <p:spPr>
             <a:xfrm>
-              <a:off x="12414573" y="11810518"/>
+              <a:off x="12427325" y="11810518"/>
               <a:ext cx="66579" cy="66579"/>
             </a:xfrm>
             <a:prstGeom prst="ellipse">
@@ -5704,7 +5704,77 @@
           </p:nvSpPr>
           <p:spPr>
             <a:xfrm>
-              <a:off x="12257601" y="11630947"/>
+              <a:off x="12312336" y="11627397"/>
+              <a:ext cx="66579" cy="66579"/>
+            </a:xfrm>
+            <a:prstGeom prst="ellipse">
+              <a:avLst/>
+            </a:prstGeom>
+            <a:solidFill>
+              <a:srgbClr val="164BCE">
+                <a:alpha val="100000"/>
+              </a:srgbClr>
+            </a:solidFill>
+            <a:ln w="9818" cap="rnd">
+              <a:solidFill>
+                <a:srgbClr val="164BCE">
+                  <a:alpha val="100000"/>
+                </a:srgbClr>
+              </a:solidFill>
+              <a:prstDash val="solid"/>
+              <a:round/>
+            </a:ln>
+          </p:spPr>
+          <p:txBody>
+            <a:bodyPr/>
+            <a:lstStyle/>
+            <a:p/>
+          </p:txBody>
+        </p:sp>
+        <p:sp>
+          <p:nvSpPr>
+            <p:cNvPr id="65" name="pt65"/>
+            <p:cNvSpPr/>
+            <p:nvPr/>
+          </p:nvSpPr>
+          <p:spPr>
+            <a:xfrm>
+              <a:off x="12312336" y="11444275"/>
+              <a:ext cx="66579" cy="66579"/>
+            </a:xfrm>
+            <a:prstGeom prst="ellipse">
+              <a:avLst/>
+            </a:prstGeom>
+            <a:solidFill>
+              <a:srgbClr val="164BCE">
+                <a:alpha val="100000"/>
+              </a:srgbClr>
+            </a:solidFill>
+            <a:ln w="9818" cap="rnd">
+              <a:solidFill>
+                <a:srgbClr val="164BCE">
+                  <a:alpha val="100000"/>
+                </a:srgbClr>
+              </a:solidFill>
+              <a:prstDash val="solid"/>
+              <a:round/>
+            </a:ln>
+          </p:spPr>
+          <p:txBody>
+            <a:bodyPr/>
+            <a:lstStyle/>
+            <a:p/>
+          </p:txBody>
+        </p:sp>
+        <p:sp>
+          <p:nvSpPr>
+            <p:cNvPr id="66" name="pt66"/>
+            <p:cNvSpPr/>
+            <p:nvPr/>
+          </p:nvSpPr>
+          <p:spPr>
+            <a:xfrm>
+              <a:off x="12272716" y="11264704"/>
               <a:ext cx="59480" cy="59480"/>
             </a:xfrm>
             <a:prstGeom prst="ellipse">
@@ -5733,13 +5803,13 @@
         </p:sp>
         <p:sp>
           <p:nvSpPr>
-            <p:cNvPr id="65" name="pt65"/>
-            <p:cNvSpPr/>
-            <p:nvPr/>
-          </p:nvSpPr>
-          <p:spPr>
-            <a:xfrm>
-              <a:off x="12234746" y="11435403"/>
+            <p:cNvPr id="67" name="pt67"/>
+            <p:cNvSpPr/>
+            <p:nvPr/>
+          </p:nvSpPr>
+          <p:spPr>
+            <a:xfrm>
+              <a:off x="12256787" y="11069160"/>
               <a:ext cx="84324" cy="84324"/>
             </a:xfrm>
             <a:prstGeom prst="ellipse">
@@ -5768,13 +5838,13 @@
         </p:sp>
         <p:sp>
           <p:nvSpPr>
-            <p:cNvPr id="66" name="pt66"/>
-            <p:cNvSpPr/>
-            <p:nvPr/>
-          </p:nvSpPr>
-          <p:spPr>
-            <a:xfrm>
-              <a:off x="12233395" y="11252281"/>
+            <p:cNvPr id="68" name="pt68"/>
+            <p:cNvSpPr/>
+            <p:nvPr/>
+          </p:nvSpPr>
+          <p:spPr>
+            <a:xfrm>
+              <a:off x="12253206" y="10886039"/>
               <a:ext cx="84324" cy="84324"/>
             </a:xfrm>
             <a:prstGeom prst="ellipse">
@@ -5803,14 +5873,49 @@
         </p:sp>
         <p:sp>
           <p:nvSpPr>
-            <p:cNvPr id="67" name="pt67"/>
-            <p:cNvSpPr/>
-            <p:nvPr/>
-          </p:nvSpPr>
-          <p:spPr>
-            <a:xfrm>
-              <a:off x="12226631" y="11064442"/>
-              <a:ext cx="93760" cy="93760"/>
+            <p:cNvPr id="69" name="pt69"/>
+            <p:cNvSpPr/>
+            <p:nvPr/>
+          </p:nvSpPr>
+          <p:spPr>
+            <a:xfrm>
+              <a:off x="12239918" y="10689629"/>
+              <a:ext cx="110901" cy="110901"/>
+            </a:xfrm>
+            <a:prstGeom prst="ellipse">
+              <a:avLst/>
+            </a:prstGeom>
+            <a:solidFill>
+              <a:srgbClr val="159230">
+                <a:alpha val="100000"/>
+              </a:srgbClr>
+            </a:solidFill>
+            <a:ln w="9818" cap="rnd">
+              <a:solidFill>
+                <a:srgbClr val="159230">
+                  <a:alpha val="100000"/>
+                </a:srgbClr>
+              </a:solidFill>
+              <a:prstDash val="solid"/>
+              <a:round/>
+            </a:ln>
+          </p:spPr>
+          <p:txBody>
+            <a:bodyPr/>
+            <a:lstStyle/>
+            <a:p/>
+          </p:txBody>
+        </p:sp>
+        <p:sp>
+          <p:nvSpPr>
+            <p:cNvPr id="70" name="pt70"/>
+            <p:cNvSpPr/>
+            <p:nvPr/>
+          </p:nvSpPr>
+          <p:spPr>
+            <a:xfrm>
+              <a:off x="12258407" y="10540788"/>
+              <a:ext cx="42339" cy="42339"/>
             </a:xfrm>
             <a:prstGeom prst="ellipse">
               <a:avLst/>
@@ -5838,14 +5943,14 @@
         </p:sp>
         <p:sp>
           <p:nvSpPr>
-            <p:cNvPr id="68" name="pt68"/>
-            <p:cNvSpPr/>
-            <p:nvPr/>
-          </p:nvSpPr>
-          <p:spPr>
-            <a:xfrm>
-              <a:off x="12216683" y="10872750"/>
-              <a:ext cx="110901" cy="110901"/>
+            <p:cNvPr id="71" name="pt71"/>
+            <p:cNvSpPr/>
+            <p:nvPr/>
+          </p:nvSpPr>
+          <p:spPr>
+            <a:xfrm>
+              <a:off x="12229777" y="10342823"/>
+              <a:ext cx="72027" cy="72027"/>
             </a:xfrm>
             <a:prstGeom prst="ellipse">
               <a:avLst/>
@@ -5873,14 +5978,49 @@
         </p:sp>
         <p:sp>
           <p:nvSpPr>
-            <p:cNvPr id="69" name="pt69"/>
-            <p:cNvSpPr/>
-            <p:nvPr/>
-          </p:nvSpPr>
-          <p:spPr>
-            <a:xfrm>
-              <a:off x="12246762" y="10723910"/>
-              <a:ext cx="42339" cy="42339"/>
+            <p:cNvPr id="72" name="pt72"/>
+            <p:cNvSpPr/>
+            <p:nvPr/>
+          </p:nvSpPr>
+          <p:spPr>
+            <a:xfrm>
+              <a:off x="12229777" y="10159701"/>
+              <a:ext cx="72027" cy="72027"/>
+            </a:xfrm>
+            <a:prstGeom prst="ellipse">
+              <a:avLst/>
+            </a:prstGeom>
+            <a:solidFill>
+              <a:srgbClr val="164BCE">
+                <a:alpha val="100000"/>
+              </a:srgbClr>
+            </a:solidFill>
+            <a:ln w="9818" cap="rnd">
+              <a:solidFill>
+                <a:srgbClr val="164BCE">
+                  <a:alpha val="100000"/>
+                </a:srgbClr>
+              </a:solidFill>
+              <a:prstDash val="solid"/>
+              <a:round/>
+            </a:ln>
+          </p:spPr>
+          <p:txBody>
+            <a:bodyPr/>
+            <a:lstStyle/>
+            <a:p/>
+          </p:txBody>
+        </p:sp>
+        <p:sp>
+          <p:nvSpPr>
+            <p:cNvPr id="73" name="pt73"/>
+            <p:cNvSpPr/>
+            <p:nvPr/>
+          </p:nvSpPr>
+          <p:spPr>
+            <a:xfrm>
+              <a:off x="12225686" y="9982854"/>
+              <a:ext cx="59480" cy="59480"/>
             </a:xfrm>
             <a:prstGeom prst="ellipse">
               <a:avLst/>
@@ -5908,14 +6048,154 @@
         </p:sp>
         <p:sp>
           <p:nvSpPr>
-            <p:cNvPr id="70" name="pt70"/>
-            <p:cNvSpPr/>
-            <p:nvPr/>
-          </p:nvSpPr>
-          <p:spPr>
-            <a:xfrm>
-              <a:off x="12210800" y="10525944"/>
-              <a:ext cx="72027" cy="72027"/>
+            <p:cNvPr id="74" name="pt74"/>
+            <p:cNvSpPr/>
+            <p:nvPr/>
+          </p:nvSpPr>
+          <p:spPr>
+            <a:xfrm>
+              <a:off x="12225686" y="9799732"/>
+              <a:ext cx="59480" cy="59480"/>
+            </a:xfrm>
+            <a:prstGeom prst="ellipse">
+              <a:avLst/>
+            </a:prstGeom>
+            <a:solidFill>
+              <a:srgbClr val="E02020">
+                <a:alpha val="100000"/>
+              </a:srgbClr>
+            </a:solidFill>
+            <a:ln w="9818" cap="rnd">
+              <a:solidFill>
+                <a:srgbClr val="E02020">
+                  <a:alpha val="100000"/>
+                </a:srgbClr>
+              </a:solidFill>
+              <a:prstDash val="solid"/>
+              <a:round/>
+            </a:ln>
+          </p:spPr>
+          <p:txBody>
+            <a:bodyPr/>
+            <a:lstStyle/>
+            <a:p/>
+          </p:txBody>
+        </p:sp>
+        <p:sp>
+          <p:nvSpPr>
+            <p:cNvPr id="75" name="pt75"/>
+            <p:cNvSpPr/>
+            <p:nvPr/>
+          </p:nvSpPr>
+          <p:spPr>
+            <a:xfrm>
+              <a:off x="12208483" y="9600941"/>
+              <a:ext cx="90819" cy="90819"/>
+            </a:xfrm>
+            <a:prstGeom prst="ellipse">
+              <a:avLst/>
+            </a:prstGeom>
+            <a:solidFill>
+              <a:srgbClr val="164BCE">
+                <a:alpha val="100000"/>
+              </a:srgbClr>
+            </a:solidFill>
+            <a:ln w="9818" cap="rnd">
+              <a:solidFill>
+                <a:srgbClr val="164BCE">
+                  <a:alpha val="100000"/>
+                </a:srgbClr>
+              </a:solidFill>
+              <a:prstDash val="solid"/>
+              <a:round/>
+            </a:ln>
+          </p:spPr>
+          <p:txBody>
+            <a:bodyPr/>
+            <a:lstStyle/>
+            <a:p/>
+          </p:txBody>
+        </p:sp>
+        <p:sp>
+          <p:nvSpPr>
+            <p:cNvPr id="76" name="pt76"/>
+            <p:cNvSpPr/>
+            <p:nvPr/>
+          </p:nvSpPr>
+          <p:spPr>
+            <a:xfrm>
+              <a:off x="12168547" y="9400074"/>
+              <a:ext cx="126309" cy="126309"/>
+            </a:xfrm>
+            <a:prstGeom prst="ellipse">
+              <a:avLst/>
+            </a:prstGeom>
+            <a:solidFill>
+              <a:srgbClr val="164BCE">
+                <a:alpha val="100000"/>
+              </a:srgbClr>
+            </a:solidFill>
+            <a:ln w="9818" cap="rnd">
+              <a:solidFill>
+                <a:srgbClr val="164BCE">
+                  <a:alpha val="100000"/>
+                </a:srgbClr>
+              </a:solidFill>
+              <a:prstDash val="solid"/>
+              <a:round/>
+            </a:ln>
+          </p:spPr>
+          <p:txBody>
+            <a:bodyPr/>
+            <a:lstStyle/>
+            <a:p/>
+          </p:txBody>
+        </p:sp>
+        <p:sp>
+          <p:nvSpPr>
+            <p:cNvPr id="77" name="pt77"/>
+            <p:cNvSpPr/>
+            <p:nvPr/>
+          </p:nvSpPr>
+          <p:spPr>
+            <a:xfrm>
+              <a:off x="12142574" y="9241798"/>
+              <a:ext cx="76620" cy="76620"/>
+            </a:xfrm>
+            <a:prstGeom prst="ellipse">
+              <a:avLst/>
+            </a:prstGeom>
+            <a:solidFill>
+              <a:srgbClr val="164BCE">
+                <a:alpha val="100000"/>
+              </a:srgbClr>
+            </a:solidFill>
+            <a:ln w="9818" cap="rnd">
+              <a:solidFill>
+                <a:srgbClr val="164BCE">
+                  <a:alpha val="100000"/>
+                </a:srgbClr>
+              </a:solidFill>
+              <a:prstDash val="solid"/>
+              <a:round/>
+            </a:ln>
+          </p:spPr>
+          <p:txBody>
+            <a:bodyPr/>
+            <a:lstStyle/>
+            <a:p/>
+          </p:txBody>
+        </p:sp>
+        <p:sp>
+          <p:nvSpPr>
+            <p:cNvPr id="78" name="pt78"/>
+            <p:cNvSpPr/>
+            <p:nvPr/>
+          </p:nvSpPr>
+          <p:spPr>
+            <a:xfrm>
+              <a:off x="12113873" y="9046129"/>
+              <a:ext cx="101715" cy="101715"/>
             </a:xfrm>
             <a:prstGeom prst="ellipse">
               <a:avLst/>
@@ -5943,13 +6223,13 @@
         </p:sp>
         <p:sp>
           <p:nvSpPr>
-            <p:cNvPr id="71" name="pt71"/>
-            <p:cNvSpPr/>
-            <p:nvPr/>
-          </p:nvSpPr>
-          <p:spPr>
-            <a:xfrm>
-              <a:off x="12210800" y="10342823"/>
+            <p:cNvPr id="79" name="pt79"/>
+            <p:cNvSpPr/>
+            <p:nvPr/>
+          </p:nvSpPr>
+          <p:spPr>
+            <a:xfrm>
+              <a:off x="12120709" y="8877851"/>
               <a:ext cx="72027" cy="72027"/>
             </a:xfrm>
             <a:prstGeom prst="ellipse">
@@ -5978,14 +6258,14 @@
         </p:sp>
         <p:sp>
           <p:nvSpPr>
-            <p:cNvPr id="72" name="pt72"/>
-            <p:cNvSpPr/>
-            <p:nvPr/>
-          </p:nvSpPr>
-          <p:spPr>
-            <a:xfrm>
-              <a:off x="12210523" y="10165975"/>
-              <a:ext cx="59480" cy="59480"/>
+            <p:cNvPr id="80" name="pt80"/>
+            <p:cNvSpPr/>
+            <p:nvPr/>
+          </p:nvSpPr>
+          <p:spPr>
+            <a:xfrm>
+              <a:off x="12108452" y="8682472"/>
+              <a:ext cx="96542" cy="96542"/>
             </a:xfrm>
             <a:prstGeom prst="ellipse">
               <a:avLst/>
@@ -6013,49 +6293,14 @@
         </p:sp>
         <p:sp>
           <p:nvSpPr>
-            <p:cNvPr id="73" name="pt73"/>
-            <p:cNvSpPr/>
-            <p:nvPr/>
-          </p:nvSpPr>
-          <p:spPr>
-            <a:xfrm>
-              <a:off x="12210523" y="9982854"/>
-              <a:ext cx="59480" cy="59480"/>
-            </a:xfrm>
-            <a:prstGeom prst="ellipse">
-              <a:avLst/>
-            </a:prstGeom>
-            <a:solidFill>
-              <a:srgbClr val="E02020">
-                <a:alpha val="100000"/>
-              </a:srgbClr>
-            </a:solidFill>
-            <a:ln w="9818" cap="rnd">
-              <a:solidFill>
-                <a:srgbClr val="E02020">
-                  <a:alpha val="100000"/>
-                </a:srgbClr>
-              </a:solidFill>
-              <a:prstDash val="solid"/>
-              <a:round/>
-            </a:ln>
-          </p:spPr>
-          <p:txBody>
-            <a:bodyPr/>
-            <a:lstStyle/>
-            <a:p/>
-          </p:txBody>
-        </p:sp>
-        <p:sp>
-          <p:nvSpPr>
-            <p:cNvPr id="74" name="pt74"/>
-            <p:cNvSpPr/>
-            <p:nvPr/>
-          </p:nvSpPr>
-          <p:spPr>
-            <a:xfrm>
-              <a:off x="12210523" y="9799732"/>
-              <a:ext cx="59480" cy="59480"/>
+            <p:cNvPr id="81" name="pt81"/>
+            <p:cNvSpPr/>
+            <p:nvPr/>
+          </p:nvSpPr>
+          <p:spPr>
+            <a:xfrm>
+              <a:off x="12114262" y="8509312"/>
+              <a:ext cx="76620" cy="76620"/>
             </a:xfrm>
             <a:prstGeom prst="ellipse">
               <a:avLst/>
@@ -6083,14 +6328,84 @@
         </p:sp>
         <p:sp>
           <p:nvSpPr>
-            <p:cNvPr id="75" name="pt75"/>
-            <p:cNvSpPr/>
-            <p:nvPr/>
-          </p:nvSpPr>
-          <p:spPr>
-            <a:xfrm>
-              <a:off x="12194853" y="9600941"/>
-              <a:ext cx="90819" cy="90819"/>
+            <p:cNvPr id="82" name="pt82"/>
+            <p:cNvSpPr/>
+            <p:nvPr/>
+          </p:nvSpPr>
+          <p:spPr>
+            <a:xfrm>
+              <a:off x="12110663" y="8331211"/>
+              <a:ext cx="66579" cy="66579"/>
+            </a:xfrm>
+            <a:prstGeom prst="ellipse">
+              <a:avLst/>
+            </a:prstGeom>
+            <a:solidFill>
+              <a:srgbClr val="111111">
+                <a:alpha val="100000"/>
+              </a:srgbClr>
+            </a:solidFill>
+            <a:ln w="9818" cap="rnd">
+              <a:solidFill>
+                <a:srgbClr val="111111">
+                  <a:alpha val="100000"/>
+                </a:srgbClr>
+              </a:solidFill>
+              <a:prstDash val="solid"/>
+              <a:round/>
+            </a:ln>
+          </p:spPr>
+          <p:txBody>
+            <a:bodyPr/>
+            <a:lstStyle/>
+            <a:p/>
+          </p:txBody>
+        </p:sp>
+        <p:sp>
+          <p:nvSpPr>
+            <p:cNvPr id="83" name="pt83"/>
+            <p:cNvSpPr/>
+            <p:nvPr/>
+          </p:nvSpPr>
+          <p:spPr>
+            <a:xfrm>
+              <a:off x="12097619" y="8141046"/>
+              <a:ext cx="80666" cy="80666"/>
+            </a:xfrm>
+            <a:prstGeom prst="ellipse">
+              <a:avLst/>
+            </a:prstGeom>
+            <a:solidFill>
+              <a:srgbClr val="111111">
+                <a:alpha val="100000"/>
+              </a:srgbClr>
+            </a:solidFill>
+            <a:ln w="9818" cap="rnd">
+              <a:solidFill>
+                <a:srgbClr val="111111">
+                  <a:alpha val="100000"/>
+                </a:srgbClr>
+              </a:solidFill>
+              <a:prstDash val="solid"/>
+              <a:round/>
+            </a:ln>
+          </p:spPr>
+          <p:txBody>
+            <a:bodyPr/>
+            <a:lstStyle/>
+            <a:p/>
+          </p:txBody>
+        </p:sp>
+        <p:sp>
+          <p:nvSpPr>
+            <p:cNvPr id="84" name="pt84"/>
+            <p:cNvSpPr/>
+            <p:nvPr/>
+          </p:nvSpPr>
+          <p:spPr>
+            <a:xfrm>
+              <a:off x="12032271" y="7943896"/>
+              <a:ext cx="108723" cy="108723"/>
             </a:xfrm>
             <a:prstGeom prst="ellipse">
               <a:avLst/>
@@ -6118,14 +6433,14 @@
         </p:sp>
         <p:sp>
           <p:nvSpPr>
-            <p:cNvPr id="76" name="pt76"/>
-            <p:cNvSpPr/>
-            <p:nvPr/>
-          </p:nvSpPr>
-          <p:spPr>
-            <a:xfrm>
-              <a:off x="12158008" y="9396710"/>
-              <a:ext cx="133037" cy="133037"/>
+            <p:cNvPr id="85" name="pt85"/>
+            <p:cNvSpPr/>
+            <p:nvPr/>
+          </p:nvSpPr>
+          <p:spPr>
+            <a:xfrm>
+              <a:off x="11994830" y="7779122"/>
+              <a:ext cx="72027" cy="72027"/>
             </a:xfrm>
             <a:prstGeom prst="ellipse">
               <a:avLst/>
@@ -6153,14 +6468,14 @@
         </p:sp>
         <p:sp>
           <p:nvSpPr>
-            <p:cNvPr id="77" name="pt77"/>
-            <p:cNvSpPr/>
-            <p:nvPr/>
-          </p:nvSpPr>
-          <p:spPr>
-            <a:xfrm>
-              <a:off x="12140062" y="9244094"/>
-              <a:ext cx="72027" cy="72027"/>
+            <p:cNvPr id="86" name="pt86"/>
+            <p:cNvSpPr/>
+            <p:nvPr/>
+          </p:nvSpPr>
+          <p:spPr>
+            <a:xfrm>
+              <a:off x="11964482" y="7593704"/>
+              <a:ext cx="76620" cy="76620"/>
             </a:xfrm>
             <a:prstGeom prst="ellipse">
               <a:avLst/>
@@ -6188,14 +6503,14 @@
         </p:sp>
         <p:sp>
           <p:nvSpPr>
-            <p:cNvPr id="78" name="pt78"/>
-            <p:cNvSpPr/>
-            <p:nvPr/>
-          </p:nvSpPr>
-          <p:spPr>
-            <a:xfrm>
-              <a:off x="12131557" y="9058676"/>
-              <a:ext cx="76620" cy="76620"/>
+            <p:cNvPr id="87" name="pt87"/>
+            <p:cNvSpPr/>
+            <p:nvPr/>
+          </p:nvSpPr>
+          <p:spPr>
+            <a:xfrm>
+              <a:off x="11962459" y="7408560"/>
+              <a:ext cx="80666" cy="80666"/>
             </a:xfrm>
             <a:prstGeom prst="ellipse">
               <a:avLst/>
@@ -6223,14 +6538,294 @@
         </p:sp>
         <p:sp>
           <p:nvSpPr>
-            <p:cNvPr id="79" name="pt79"/>
-            <p:cNvSpPr/>
-            <p:nvPr/>
-          </p:nvSpPr>
-          <p:spPr>
-            <a:xfrm>
-              <a:off x="12087095" y="8863007"/>
-              <a:ext cx="101715" cy="101715"/>
+            <p:cNvPr id="88" name="pt88"/>
+            <p:cNvSpPr/>
+            <p:nvPr/>
+          </p:nvSpPr>
+          <p:spPr>
+            <a:xfrm>
+              <a:off x="11959016" y="7232482"/>
+              <a:ext cx="66579" cy="66579"/>
+            </a:xfrm>
+            <a:prstGeom prst="ellipse">
+              <a:avLst/>
+            </a:prstGeom>
+            <a:solidFill>
+              <a:srgbClr val="164BCE">
+                <a:alpha val="100000"/>
+              </a:srgbClr>
+            </a:solidFill>
+            <a:ln w="9818" cap="rnd">
+              <a:solidFill>
+                <a:srgbClr val="164BCE">
+                  <a:alpha val="100000"/>
+                </a:srgbClr>
+              </a:solidFill>
+              <a:prstDash val="solid"/>
+              <a:round/>
+            </a:ln>
+          </p:spPr>
+          <p:txBody>
+            <a:bodyPr/>
+            <a:lstStyle/>
+            <a:p/>
+          </p:txBody>
+        </p:sp>
+        <p:sp>
+          <p:nvSpPr>
+            <p:cNvPr id="89" name="pt89"/>
+            <p:cNvSpPr/>
+            <p:nvPr/>
+          </p:nvSpPr>
+          <p:spPr>
+            <a:xfrm>
+              <a:off x="11926390" y="7020379"/>
+              <a:ext cx="124541" cy="124541"/>
+            </a:xfrm>
+            <a:prstGeom prst="ellipse">
+              <a:avLst/>
+            </a:prstGeom>
+            <a:solidFill>
+              <a:srgbClr val="164BCE">
+                <a:alpha val="100000"/>
+              </a:srgbClr>
+            </a:solidFill>
+            <a:ln w="9818" cap="rnd">
+              <a:solidFill>
+                <a:srgbClr val="164BCE">
+                  <a:alpha val="100000"/>
+                </a:srgbClr>
+              </a:solidFill>
+              <a:prstDash val="solid"/>
+              <a:round/>
+            </a:ln>
+          </p:spPr>
+          <p:txBody>
+            <a:bodyPr/>
+            <a:lstStyle/>
+            <a:p/>
+          </p:txBody>
+        </p:sp>
+        <p:sp>
+          <p:nvSpPr>
+            <p:cNvPr id="90" name="pt90"/>
+            <p:cNvSpPr/>
+            <p:nvPr/>
+          </p:nvSpPr>
+          <p:spPr>
+            <a:xfrm>
+              <a:off x="11881360" y="6829127"/>
+              <a:ext cx="140803" cy="140803"/>
+            </a:xfrm>
+            <a:prstGeom prst="ellipse">
+              <a:avLst/>
+            </a:prstGeom>
+            <a:solidFill>
+              <a:srgbClr val="164BCE">
+                <a:alpha val="100000"/>
+              </a:srgbClr>
+            </a:solidFill>
+            <a:ln w="9818" cap="rnd">
+              <a:solidFill>
+                <a:srgbClr val="164BCE">
+                  <a:alpha val="100000"/>
+                </a:srgbClr>
+              </a:solidFill>
+              <a:prstDash val="solid"/>
+              <a:round/>
+            </a:ln>
+          </p:spPr>
+          <p:txBody>
+            <a:bodyPr/>
+            <a:lstStyle/>
+            <a:p/>
+          </p:txBody>
+        </p:sp>
+        <p:sp>
+          <p:nvSpPr>
+            <p:cNvPr id="91" name="pt91"/>
+            <p:cNvSpPr/>
+            <p:nvPr/>
+          </p:nvSpPr>
+          <p:spPr>
+            <a:xfrm>
+              <a:off x="11872374" y="6672563"/>
+              <a:ext cx="87688" cy="87688"/>
+            </a:xfrm>
+            <a:prstGeom prst="ellipse">
+              <a:avLst/>
+            </a:prstGeom>
+            <a:solidFill>
+              <a:srgbClr val="111111">
+                <a:alpha val="100000"/>
+              </a:srgbClr>
+            </a:solidFill>
+            <a:ln w="9818" cap="rnd">
+              <a:solidFill>
+                <a:srgbClr val="111111">
+                  <a:alpha val="100000"/>
+                </a:srgbClr>
+              </a:solidFill>
+              <a:prstDash val="solid"/>
+              <a:round/>
+            </a:ln>
+          </p:spPr>
+          <p:txBody>
+            <a:bodyPr/>
+            <a:lstStyle/>
+            <a:p/>
+          </p:txBody>
+        </p:sp>
+        <p:sp>
+          <p:nvSpPr>
+            <p:cNvPr id="92" name="pt92"/>
+            <p:cNvSpPr/>
+            <p:nvPr/>
+          </p:nvSpPr>
+          <p:spPr>
+            <a:xfrm>
+              <a:off x="11772288" y="6466767"/>
+              <a:ext cx="133037" cy="133037"/>
+            </a:xfrm>
+            <a:prstGeom prst="ellipse">
+              <a:avLst/>
+            </a:prstGeom>
+            <a:solidFill>
+              <a:srgbClr val="164BCE">
+                <a:alpha val="100000"/>
+              </a:srgbClr>
+            </a:solidFill>
+            <a:ln w="9818" cap="rnd">
+              <a:solidFill>
+                <a:srgbClr val="164BCE">
+                  <a:alpha val="100000"/>
+                </a:srgbClr>
+              </a:solidFill>
+              <a:prstDash val="solid"/>
+              <a:round/>
+            </a:ln>
+          </p:spPr>
+          <p:txBody>
+            <a:bodyPr/>
+            <a:lstStyle/>
+            <a:p/>
+          </p:txBody>
+        </p:sp>
+        <p:sp>
+          <p:nvSpPr>
+            <p:cNvPr id="93" name="pt93"/>
+            <p:cNvSpPr/>
+            <p:nvPr/>
+          </p:nvSpPr>
+          <p:spPr>
+            <a:xfrm>
+              <a:off x="11734982" y="6298094"/>
+              <a:ext cx="104140" cy="104140"/>
+            </a:xfrm>
+            <a:prstGeom prst="ellipse">
+              <a:avLst/>
+            </a:prstGeom>
+            <a:solidFill>
+              <a:srgbClr val="111111">
+                <a:alpha val="100000"/>
+              </a:srgbClr>
+            </a:solidFill>
+            <a:ln w="9818" cap="rnd">
+              <a:solidFill>
+                <a:srgbClr val="111111">
+                  <a:alpha val="100000"/>
+                </a:srgbClr>
+              </a:solidFill>
+              <a:prstDash val="solid"/>
+              <a:round/>
+            </a:ln>
+          </p:spPr>
+          <p:txBody>
+            <a:bodyPr/>
+            <a:lstStyle/>
+            <a:p/>
+          </p:txBody>
+        </p:sp>
+        <p:sp>
+          <p:nvSpPr>
+            <p:cNvPr id="94" name="pt94"/>
+            <p:cNvSpPr/>
+            <p:nvPr/>
+          </p:nvSpPr>
+          <p:spPr>
+            <a:xfrm>
+              <a:off x="11738478" y="6131029"/>
+              <a:ext cx="72027" cy="72027"/>
+            </a:xfrm>
+            <a:prstGeom prst="ellipse">
+              <a:avLst/>
+            </a:prstGeom>
+            <a:solidFill>
+              <a:srgbClr val="164BCE">
+                <a:alpha val="100000"/>
+              </a:srgbClr>
+            </a:solidFill>
+            <a:ln w="9818" cap="rnd">
+              <a:solidFill>
+                <a:srgbClr val="164BCE">
+                  <a:alpha val="100000"/>
+                </a:srgbClr>
+              </a:solidFill>
+              <a:prstDash val="solid"/>
+              <a:round/>
+            </a:ln>
+          </p:spPr>
+          <p:txBody>
+            <a:bodyPr/>
+            <a:lstStyle/>
+            <a:p/>
+          </p:txBody>
+        </p:sp>
+        <p:sp>
+          <p:nvSpPr>
+            <p:cNvPr id="95" name="pt95"/>
+            <p:cNvSpPr/>
+            <p:nvPr/>
+          </p:nvSpPr>
+          <p:spPr>
+            <a:xfrm>
+              <a:off x="11736182" y="5945611"/>
+              <a:ext cx="76620" cy="76620"/>
+            </a:xfrm>
+            <a:prstGeom prst="ellipse">
+              <a:avLst/>
+            </a:prstGeom>
+            <a:solidFill>
+              <a:srgbClr val="164BCE">
+                <a:alpha val="100000"/>
+              </a:srgbClr>
+            </a:solidFill>
+            <a:ln w="9818" cap="rnd">
+              <a:solidFill>
+                <a:srgbClr val="164BCE">
+                  <a:alpha val="100000"/>
+                </a:srgbClr>
+              </a:solidFill>
+              <a:prstDash val="solid"/>
+              <a:round/>
+            </a:ln>
+          </p:spPr>
+          <p:txBody>
+            <a:bodyPr/>
+            <a:lstStyle/>
+            <a:p/>
+          </p:txBody>
+        </p:sp>
+        <p:sp>
+          <p:nvSpPr>
+            <p:cNvPr id="96" name="pt96"/>
+            <p:cNvSpPr/>
+            <p:nvPr/>
+          </p:nvSpPr>
+          <p:spPr>
+            <a:xfrm>
+              <a:off x="11732329" y="5758638"/>
+              <a:ext cx="84324" cy="84324"/>
             </a:xfrm>
             <a:prstGeom prst="ellipse">
               <a:avLst/>
@@ -6258,14 +6853,14 @@
         </p:sp>
         <p:sp>
           <p:nvSpPr>
-            <p:cNvPr id="80" name="pt80"/>
-            <p:cNvSpPr/>
-            <p:nvPr/>
-          </p:nvSpPr>
-          <p:spPr>
-            <a:xfrm>
-              <a:off x="12093422" y="8692433"/>
-              <a:ext cx="76620" cy="76620"/>
+            <p:cNvPr id="97" name="pt97"/>
+            <p:cNvSpPr/>
+            <p:nvPr/>
+          </p:nvSpPr>
+          <p:spPr>
+            <a:xfrm>
+              <a:off x="11729082" y="5572269"/>
+              <a:ext cx="90819" cy="90819"/>
             </a:xfrm>
             <a:prstGeom prst="ellipse">
               <a:avLst/>
@@ -6293,14 +6888,154 @@
         </p:sp>
         <p:sp>
           <p:nvSpPr>
-            <p:cNvPr id="81" name="pt81"/>
-            <p:cNvSpPr/>
-            <p:nvPr/>
-          </p:nvSpPr>
-          <p:spPr>
-            <a:xfrm>
-              <a:off x="12078642" y="8499351"/>
-              <a:ext cx="96542" cy="96542"/>
+            <p:cNvPr id="98" name="pt98"/>
+            <p:cNvSpPr/>
+            <p:nvPr/>
+          </p:nvSpPr>
+          <p:spPr>
+            <a:xfrm>
+              <a:off x="11695322" y="5383699"/>
+              <a:ext cx="101715" cy="101715"/>
+            </a:xfrm>
+            <a:prstGeom prst="ellipse">
+              <a:avLst/>
+            </a:prstGeom>
+            <a:solidFill>
+              <a:srgbClr val="164BCE">
+                <a:alpha val="100000"/>
+              </a:srgbClr>
+            </a:solidFill>
+            <a:ln w="9818" cap="rnd">
+              <a:solidFill>
+                <a:srgbClr val="164BCE">
+                  <a:alpha val="100000"/>
+                </a:srgbClr>
+              </a:solidFill>
+              <a:prstDash val="solid"/>
+              <a:round/>
+            </a:ln>
+          </p:spPr>
+          <p:txBody>
+            <a:bodyPr/>
+            <a:lstStyle/>
+            <a:p/>
+          </p:txBody>
+        </p:sp>
+        <p:sp>
+          <p:nvSpPr>
+            <p:cNvPr id="99" name="pt99"/>
+            <p:cNvSpPr/>
+            <p:nvPr/>
+          </p:nvSpPr>
+          <p:spPr>
+            <a:xfrm>
+              <a:off x="11702335" y="5207591"/>
+              <a:ext cx="87688" cy="87688"/>
+            </a:xfrm>
+            <a:prstGeom prst="ellipse">
+              <a:avLst/>
+            </a:prstGeom>
+            <a:solidFill>
+              <a:srgbClr val="164BCE">
+                <a:alpha val="100000"/>
+              </a:srgbClr>
+            </a:solidFill>
+            <a:ln w="9818" cap="rnd">
+              <a:solidFill>
+                <a:srgbClr val="164BCE">
+                  <a:alpha val="100000"/>
+                </a:srgbClr>
+              </a:solidFill>
+              <a:prstDash val="solid"/>
+              <a:round/>
+            </a:ln>
+          </p:spPr>
+          <p:txBody>
+            <a:bodyPr/>
+            <a:lstStyle/>
+            <a:p/>
+          </p:txBody>
+        </p:sp>
+        <p:sp>
+          <p:nvSpPr>
+            <p:cNvPr id="100" name="pt100"/>
+            <p:cNvSpPr/>
+            <p:nvPr/>
+          </p:nvSpPr>
+          <p:spPr>
+            <a:xfrm>
+              <a:off x="11688650" y="5010784"/>
+              <a:ext cx="115059" cy="115059"/>
+            </a:xfrm>
+            <a:prstGeom prst="ellipse">
+              <a:avLst/>
+            </a:prstGeom>
+            <a:solidFill>
+              <a:srgbClr val="159230">
+                <a:alpha val="100000"/>
+              </a:srgbClr>
+            </a:solidFill>
+            <a:ln w="9818" cap="rnd">
+              <a:solidFill>
+                <a:srgbClr val="159230">
+                  <a:alpha val="100000"/>
+                </a:srgbClr>
+              </a:solidFill>
+              <a:prstDash val="solid"/>
+              <a:round/>
+            </a:ln>
+          </p:spPr>
+          <p:txBody>
+            <a:bodyPr/>
+            <a:lstStyle/>
+            <a:p/>
+          </p:txBody>
+        </p:sp>
+        <p:sp>
+          <p:nvSpPr>
+            <p:cNvPr id="101" name="pt101"/>
+            <p:cNvSpPr/>
+            <p:nvPr/>
+          </p:nvSpPr>
+          <p:spPr>
+            <a:xfrm>
+              <a:off x="11610240" y="4849179"/>
+              <a:ext cx="72027" cy="72027"/>
+            </a:xfrm>
+            <a:prstGeom prst="ellipse">
+              <a:avLst/>
+            </a:prstGeom>
+            <a:solidFill>
+              <a:srgbClr val="164BCE">
+                <a:alpha val="100000"/>
+              </a:srgbClr>
+            </a:solidFill>
+            <a:ln w="9818" cap="rnd">
+              <a:solidFill>
+                <a:srgbClr val="164BCE">
+                  <a:alpha val="100000"/>
+                </a:srgbClr>
+              </a:solidFill>
+              <a:prstDash val="solid"/>
+              <a:round/>
+            </a:ln>
+          </p:spPr>
+          <p:txBody>
+            <a:bodyPr/>
+            <a:lstStyle/>
+            <a:p/>
+          </p:txBody>
+        </p:sp>
+        <p:sp>
+          <p:nvSpPr>
+            <p:cNvPr id="102" name="pt102"/>
+            <p:cNvSpPr/>
+            <p:nvPr/>
+          </p:nvSpPr>
+          <p:spPr>
+            <a:xfrm>
+              <a:off x="11506329" y="4629480"/>
+              <a:ext cx="145181" cy="145181"/>
             </a:xfrm>
             <a:prstGeom prst="ellipse">
               <a:avLst/>
@@ -6328,14 +7063,259 @@
         </p:sp>
         <p:sp>
           <p:nvSpPr>
-            <p:cNvPr id="82" name="pt82"/>
-            <p:cNvSpPr/>
-            <p:nvPr/>
-          </p:nvSpPr>
-          <p:spPr>
-            <a:xfrm>
-              <a:off x="12091986" y="8331211"/>
-              <a:ext cx="66579" cy="66579"/>
+            <p:cNvPr id="103" name="pt103"/>
+            <p:cNvSpPr/>
+            <p:nvPr/>
+          </p:nvSpPr>
+          <p:spPr>
+            <a:xfrm>
+              <a:off x="11513794" y="4480640"/>
+              <a:ext cx="76620" cy="76620"/>
+            </a:xfrm>
+            <a:prstGeom prst="ellipse">
+              <a:avLst/>
+            </a:prstGeom>
+            <a:solidFill>
+              <a:srgbClr val="164BCE">
+                <a:alpha val="100000"/>
+              </a:srgbClr>
+            </a:solidFill>
+            <a:ln w="9818" cap="rnd">
+              <a:solidFill>
+                <a:srgbClr val="164BCE">
+                  <a:alpha val="100000"/>
+                </a:srgbClr>
+              </a:solidFill>
+              <a:prstDash val="solid"/>
+              <a:round/>
+            </a:ln>
+          </p:spPr>
+          <p:txBody>
+            <a:bodyPr/>
+            <a:lstStyle/>
+            <a:p/>
+          </p:txBody>
+        </p:sp>
+        <p:sp>
+          <p:nvSpPr>
+            <p:cNvPr id="104" name="pt104"/>
+            <p:cNvSpPr/>
+            <p:nvPr/>
+          </p:nvSpPr>
+          <p:spPr>
+            <a:xfrm>
+              <a:off x="11415570" y="4263237"/>
+              <a:ext cx="145181" cy="145181"/>
+            </a:xfrm>
+            <a:prstGeom prst="ellipse">
+              <a:avLst/>
+            </a:prstGeom>
+            <a:solidFill>
+              <a:srgbClr val="164BCE">
+                <a:alpha val="100000"/>
+              </a:srgbClr>
+            </a:solidFill>
+            <a:ln w="9818" cap="rnd">
+              <a:solidFill>
+                <a:srgbClr val="164BCE">
+                  <a:alpha val="100000"/>
+                </a:srgbClr>
+              </a:solidFill>
+              <a:prstDash val="solid"/>
+              <a:round/>
+            </a:ln>
+          </p:spPr>
+          <p:txBody>
+            <a:bodyPr/>
+            <a:lstStyle/>
+            <a:p/>
+          </p:txBody>
+        </p:sp>
+        <p:sp>
+          <p:nvSpPr>
+            <p:cNvPr id="105" name="pt105"/>
+            <p:cNvSpPr/>
+            <p:nvPr/>
+          </p:nvSpPr>
+          <p:spPr>
+            <a:xfrm>
+              <a:off x="11416928" y="4112374"/>
+              <a:ext cx="80666" cy="80666"/>
+            </a:xfrm>
+            <a:prstGeom prst="ellipse">
+              <a:avLst/>
+            </a:prstGeom>
+            <a:solidFill>
+              <a:srgbClr val="164BCE">
+                <a:alpha val="100000"/>
+              </a:srgbClr>
+            </a:solidFill>
+            <a:ln w="9818" cap="rnd">
+              <a:solidFill>
+                <a:srgbClr val="164BCE">
+                  <a:alpha val="100000"/>
+                </a:srgbClr>
+              </a:solidFill>
+              <a:prstDash val="solid"/>
+              <a:round/>
+            </a:ln>
+          </p:spPr>
+          <p:txBody>
+            <a:bodyPr/>
+            <a:lstStyle/>
+            <a:p/>
+          </p:txBody>
+        </p:sp>
+        <p:sp>
+          <p:nvSpPr>
+            <p:cNvPr id="106" name="pt106"/>
+            <p:cNvSpPr/>
+            <p:nvPr/>
+          </p:nvSpPr>
+          <p:spPr>
+            <a:xfrm>
+              <a:off x="11404724" y="3925741"/>
+              <a:ext cx="87688" cy="87688"/>
+            </a:xfrm>
+            <a:prstGeom prst="ellipse">
+              <a:avLst/>
+            </a:prstGeom>
+            <a:solidFill>
+              <a:srgbClr val="164BCE">
+                <a:alpha val="100000"/>
+              </a:srgbClr>
+            </a:solidFill>
+            <a:ln w="9818" cap="rnd">
+              <a:solidFill>
+                <a:srgbClr val="164BCE">
+                  <a:alpha val="100000"/>
+                </a:srgbClr>
+              </a:solidFill>
+              <a:prstDash val="solid"/>
+              <a:round/>
+            </a:ln>
+          </p:spPr>
+          <p:txBody>
+            <a:bodyPr/>
+            <a:lstStyle/>
+            <a:p/>
+          </p:txBody>
+        </p:sp>
+        <p:sp>
+          <p:nvSpPr>
+            <p:cNvPr id="107" name="pt107"/>
+            <p:cNvSpPr/>
+            <p:nvPr/>
+          </p:nvSpPr>
+          <p:spPr>
+            <a:xfrm>
+              <a:off x="11356479" y="3746131"/>
+              <a:ext cx="80666" cy="80666"/>
+            </a:xfrm>
+            <a:prstGeom prst="ellipse">
+              <a:avLst/>
+            </a:prstGeom>
+            <a:solidFill>
+              <a:srgbClr val="164BCE">
+                <a:alpha val="100000"/>
+              </a:srgbClr>
+            </a:solidFill>
+            <a:ln w="9818" cap="rnd">
+              <a:solidFill>
+                <a:srgbClr val="164BCE">
+                  <a:alpha val="100000"/>
+                </a:srgbClr>
+              </a:solidFill>
+              <a:prstDash val="solid"/>
+              <a:round/>
+            </a:ln>
+          </p:spPr>
+          <p:txBody>
+            <a:bodyPr/>
+            <a:lstStyle/>
+            <a:p/>
+          </p:txBody>
+        </p:sp>
+        <p:sp>
+          <p:nvSpPr>
+            <p:cNvPr id="108" name="pt108"/>
+            <p:cNvSpPr/>
+            <p:nvPr/>
+          </p:nvSpPr>
+          <p:spPr>
+            <a:xfrm>
+              <a:off x="11250082" y="3557933"/>
+              <a:ext cx="90819" cy="90819"/>
+            </a:xfrm>
+            <a:prstGeom prst="ellipse">
+              <a:avLst/>
+            </a:prstGeom>
+            <a:solidFill>
+              <a:srgbClr val="164BCE">
+                <a:alpha val="100000"/>
+              </a:srgbClr>
+            </a:solidFill>
+            <a:ln w="9818" cap="rnd">
+              <a:solidFill>
+                <a:srgbClr val="164BCE">
+                  <a:alpha val="100000"/>
+                </a:srgbClr>
+              </a:solidFill>
+              <a:prstDash val="solid"/>
+              <a:round/>
+            </a:ln>
+          </p:spPr>
+          <p:txBody>
+            <a:bodyPr/>
+            <a:lstStyle/>
+            <a:p/>
+          </p:txBody>
+        </p:sp>
+        <p:sp>
+          <p:nvSpPr>
+            <p:cNvPr id="109" name="pt109"/>
+            <p:cNvSpPr/>
+            <p:nvPr/>
+          </p:nvSpPr>
+          <p:spPr>
+            <a:xfrm>
+              <a:off x="11146186" y="3381911"/>
+              <a:ext cx="76620" cy="76620"/>
+            </a:xfrm>
+            <a:prstGeom prst="ellipse">
+              <a:avLst/>
+            </a:prstGeom>
+            <a:solidFill>
+              <a:srgbClr val="164BCE">
+                <a:alpha val="100000"/>
+              </a:srgbClr>
+            </a:solidFill>
+            <a:ln w="9818" cap="rnd">
+              <a:solidFill>
+                <a:srgbClr val="164BCE">
+                  <a:alpha val="100000"/>
+                </a:srgbClr>
+              </a:solidFill>
+              <a:prstDash val="solid"/>
+              <a:round/>
+            </a:ln>
+          </p:spPr>
+          <p:txBody>
+            <a:bodyPr/>
+            <a:lstStyle/>
+            <a:p/>
+          </p:txBody>
+        </p:sp>
+        <p:sp>
+          <p:nvSpPr>
+            <p:cNvPr id="110" name="pt110"/>
+            <p:cNvSpPr/>
+            <p:nvPr/>
+          </p:nvSpPr>
+          <p:spPr>
+            <a:xfrm>
+              <a:off x="11082503" y="3183863"/>
+              <a:ext cx="106472" cy="106472"/>
             </a:xfrm>
             <a:prstGeom prst="ellipse">
               <a:avLst/>
@@ -6363,14 +7343,14 @@
         </p:sp>
         <p:sp>
           <p:nvSpPr>
-            <p:cNvPr id="83" name="pt83"/>
-            <p:cNvSpPr/>
-            <p:nvPr/>
-          </p:nvSpPr>
-          <p:spPr>
-            <a:xfrm>
-              <a:off x="12074770" y="8141046"/>
-              <a:ext cx="80666" cy="80666"/>
+            <p:cNvPr id="111" name="pt111"/>
+            <p:cNvSpPr/>
+            <p:nvPr/>
+          </p:nvSpPr>
+          <p:spPr>
+            <a:xfrm>
+              <a:off x="10454384" y="3007098"/>
+              <a:ext cx="93760" cy="93760"/>
             </a:xfrm>
             <a:prstGeom prst="ellipse">
               <a:avLst/>
@@ -6398,14 +7378,14 @@
         </p:sp>
         <p:sp>
           <p:nvSpPr>
-            <p:cNvPr id="84" name="pt84"/>
-            <p:cNvSpPr/>
-            <p:nvPr/>
-          </p:nvSpPr>
-          <p:spPr>
-            <a:xfrm>
-              <a:off x="12010229" y="7943896"/>
-              <a:ext cx="108723" cy="108723"/>
+            <p:cNvPr id="112" name="pt112"/>
+            <p:cNvSpPr/>
+            <p:nvPr/>
+          </p:nvSpPr>
+          <p:spPr>
+            <a:xfrm>
+              <a:off x="10138163" y="2795484"/>
+              <a:ext cx="150744" cy="150744"/>
             </a:xfrm>
             <a:prstGeom prst="ellipse">
               <a:avLst/>
@@ -6433,993 +7413,13 @@
         </p:sp>
         <p:sp>
           <p:nvSpPr>
-            <p:cNvPr id="85" name="pt85"/>
-            <p:cNvSpPr/>
-            <p:nvPr/>
-          </p:nvSpPr>
-          <p:spPr>
-            <a:xfrm>
-              <a:off x="11976654" y="7779122"/>
-              <a:ext cx="72027" cy="72027"/>
-            </a:xfrm>
-            <a:prstGeom prst="ellipse">
-              <a:avLst/>
-            </a:prstGeom>
-            <a:solidFill>
-              <a:srgbClr val="164BCE">
-                <a:alpha val="100000"/>
-              </a:srgbClr>
-            </a:solidFill>
-            <a:ln w="9818" cap="rnd">
-              <a:solidFill>
-                <a:srgbClr val="164BCE">
-                  <a:alpha val="100000"/>
-                </a:srgbClr>
-              </a:solidFill>
-              <a:prstDash val="solid"/>
-              <a:round/>
-            </a:ln>
-          </p:spPr>
-          <p:txBody>
-            <a:bodyPr/>
-            <a:lstStyle/>
-            <a:p/>
-          </p:txBody>
-        </p:sp>
-        <p:sp>
-          <p:nvSpPr>
-            <p:cNvPr id="86" name="pt86"/>
-            <p:cNvSpPr/>
-            <p:nvPr/>
-          </p:nvSpPr>
-          <p:spPr>
-            <a:xfrm>
-              <a:off x="11942817" y="7593704"/>
-              <a:ext cx="76620" cy="76620"/>
-            </a:xfrm>
-            <a:prstGeom prst="ellipse">
-              <a:avLst/>
-            </a:prstGeom>
-            <a:solidFill>
-              <a:srgbClr val="164BCE">
-                <a:alpha val="100000"/>
-              </a:srgbClr>
-            </a:solidFill>
-            <a:ln w="9818" cap="rnd">
-              <a:solidFill>
-                <a:srgbClr val="164BCE">
-                  <a:alpha val="100000"/>
-                </a:srgbClr>
-              </a:solidFill>
-              <a:prstDash val="solid"/>
-              <a:round/>
-            </a:ln>
-          </p:spPr>
-          <p:txBody>
-            <a:bodyPr/>
-            <a:lstStyle/>
-            <a:p/>
-          </p:txBody>
-        </p:sp>
-        <p:sp>
-          <p:nvSpPr>
-            <p:cNvPr id="87" name="pt87"/>
-            <p:cNvSpPr/>
-            <p:nvPr/>
-          </p:nvSpPr>
-          <p:spPr>
-            <a:xfrm>
-              <a:off x="11940794" y="7408560"/>
-              <a:ext cx="80666" cy="80666"/>
-            </a:xfrm>
-            <a:prstGeom prst="ellipse">
-              <a:avLst/>
-            </a:prstGeom>
-            <a:solidFill>
-              <a:srgbClr val="164BCE">
-                <a:alpha val="100000"/>
-              </a:srgbClr>
-            </a:solidFill>
-            <a:ln w="9818" cap="rnd">
-              <a:solidFill>
-                <a:srgbClr val="164BCE">
-                  <a:alpha val="100000"/>
-                </a:srgbClr>
-              </a:solidFill>
-              <a:prstDash val="solid"/>
-              <a:round/>
-            </a:ln>
-          </p:spPr>
-          <p:txBody>
-            <a:bodyPr/>
-            <a:lstStyle/>
-            <a:p/>
-          </p:txBody>
-        </p:sp>
-        <p:sp>
-          <p:nvSpPr>
-            <p:cNvPr id="88" name="pt88"/>
-            <p:cNvSpPr/>
-            <p:nvPr/>
-          </p:nvSpPr>
-          <p:spPr>
-            <a:xfrm>
-              <a:off x="11914960" y="7203501"/>
-              <a:ext cx="124541" cy="124541"/>
-            </a:xfrm>
-            <a:prstGeom prst="ellipse">
-              <a:avLst/>
-            </a:prstGeom>
-            <a:solidFill>
-              <a:srgbClr val="164BCE">
-                <a:alpha val="100000"/>
-              </a:srgbClr>
-            </a:solidFill>
-            <a:ln w="9818" cap="rnd">
-              <a:solidFill>
-                <a:srgbClr val="164BCE">
-                  <a:alpha val="100000"/>
-                </a:srgbClr>
-              </a:solidFill>
-              <a:prstDash val="solid"/>
-              <a:round/>
-            </a:ln>
-          </p:spPr>
-          <p:txBody>
-            <a:bodyPr/>
-            <a:lstStyle/>
-            <a:p/>
-          </p:txBody>
-        </p:sp>
-        <p:sp>
-          <p:nvSpPr>
-            <p:cNvPr id="89" name="pt89"/>
-            <p:cNvSpPr/>
-            <p:nvPr/>
-          </p:nvSpPr>
-          <p:spPr>
-            <a:xfrm>
-              <a:off x="11939953" y="7049360"/>
-              <a:ext cx="66579" cy="66579"/>
-            </a:xfrm>
-            <a:prstGeom prst="ellipse">
-              <a:avLst/>
-            </a:prstGeom>
-            <a:solidFill>
-              <a:srgbClr val="164BCE">
-                <a:alpha val="100000"/>
-              </a:srgbClr>
-            </a:solidFill>
-            <a:ln w="9818" cap="rnd">
-              <a:solidFill>
-                <a:srgbClr val="164BCE">
-                  <a:alpha val="100000"/>
-                </a:srgbClr>
-              </a:solidFill>
-              <a:prstDash val="solid"/>
-              <a:round/>
-            </a:ln>
-          </p:spPr>
-          <p:txBody>
-            <a:bodyPr/>
-            <a:lstStyle/>
-            <a:p/>
-          </p:txBody>
-        </p:sp>
-        <p:sp>
-          <p:nvSpPr>
-            <p:cNvPr id="90" name="pt90"/>
-            <p:cNvSpPr/>
-            <p:nvPr/>
-          </p:nvSpPr>
-          <p:spPr>
-            <a:xfrm>
-              <a:off x="11861969" y="6829127"/>
-              <a:ext cx="140803" cy="140803"/>
-            </a:xfrm>
-            <a:prstGeom prst="ellipse">
-              <a:avLst/>
-            </a:prstGeom>
-            <a:solidFill>
-              <a:srgbClr val="164BCE">
-                <a:alpha val="100000"/>
-              </a:srgbClr>
-            </a:solidFill>
-            <a:ln w="9818" cap="rnd">
-              <a:solidFill>
-                <a:srgbClr val="164BCE">
-                  <a:alpha val="100000"/>
-                </a:srgbClr>
-              </a:solidFill>
-              <a:prstDash val="solid"/>
-              <a:round/>
-            </a:ln>
-          </p:spPr>
-          <p:txBody>
-            <a:bodyPr/>
-            <a:lstStyle/>
-            <a:p/>
-          </p:txBody>
-        </p:sp>
-        <p:sp>
-          <p:nvSpPr>
-            <p:cNvPr id="91" name="pt91"/>
-            <p:cNvSpPr/>
-            <p:nvPr/>
-          </p:nvSpPr>
-          <p:spPr>
-            <a:xfrm>
-              <a:off x="11841474" y="6672563"/>
-              <a:ext cx="87688" cy="87688"/>
-            </a:xfrm>
-            <a:prstGeom prst="ellipse">
-              <a:avLst/>
-            </a:prstGeom>
-            <a:solidFill>
-              <a:srgbClr val="111111">
-                <a:alpha val="100000"/>
-              </a:srgbClr>
-            </a:solidFill>
-            <a:ln w="9818" cap="rnd">
-              <a:solidFill>
-                <a:srgbClr val="111111">
-                  <a:alpha val="100000"/>
-                </a:srgbClr>
-              </a:solidFill>
-              <a:prstDash val="solid"/>
-              <a:round/>
-            </a:ln>
-          </p:spPr>
-          <p:txBody>
-            <a:bodyPr/>
-            <a:lstStyle/>
-            <a:p/>
-          </p:txBody>
-        </p:sp>
-        <p:sp>
-          <p:nvSpPr>
-            <p:cNvPr id="92" name="pt92"/>
-            <p:cNvSpPr/>
-            <p:nvPr/>
-          </p:nvSpPr>
-          <p:spPr>
-            <a:xfrm>
-              <a:off x="11753438" y="6466767"/>
-              <a:ext cx="133037" cy="133037"/>
-            </a:xfrm>
-            <a:prstGeom prst="ellipse">
-              <a:avLst/>
-            </a:prstGeom>
-            <a:solidFill>
-              <a:srgbClr val="164BCE">
-                <a:alpha val="100000"/>
-              </a:srgbClr>
-            </a:solidFill>
-            <a:ln w="9818" cap="rnd">
-              <a:solidFill>
-                <a:srgbClr val="164BCE">
-                  <a:alpha val="100000"/>
-                </a:srgbClr>
-              </a:solidFill>
-              <a:prstDash val="solid"/>
-              <a:round/>
-            </a:ln>
-          </p:spPr>
-          <p:txBody>
-            <a:bodyPr/>
-            <a:lstStyle/>
-            <a:p/>
-          </p:txBody>
-        </p:sp>
-        <p:sp>
-          <p:nvSpPr>
-            <p:cNvPr id="93" name="pt93"/>
-            <p:cNvSpPr/>
-            <p:nvPr/>
-          </p:nvSpPr>
-          <p:spPr>
-            <a:xfrm>
-              <a:off x="11722616" y="6311854"/>
-              <a:ext cx="76620" cy="76620"/>
-            </a:xfrm>
-            <a:prstGeom prst="ellipse">
-              <a:avLst/>
-            </a:prstGeom>
-            <a:solidFill>
-              <a:srgbClr val="164BCE">
-                <a:alpha val="100000"/>
-              </a:srgbClr>
-            </a:solidFill>
-            <a:ln w="9818" cap="rnd">
-              <a:solidFill>
-                <a:srgbClr val="164BCE">
-                  <a:alpha val="100000"/>
-                </a:srgbClr>
-              </a:solidFill>
-              <a:prstDash val="solid"/>
-              <a:round/>
-            </a:ln>
-          </p:spPr>
-          <p:txBody>
-            <a:bodyPr/>
-            <a:lstStyle/>
-            <a:p/>
-          </p:txBody>
-        </p:sp>
-        <p:sp>
-          <p:nvSpPr>
-            <p:cNvPr id="94" name="pt94"/>
-            <p:cNvSpPr/>
-            <p:nvPr/>
-          </p:nvSpPr>
-          <p:spPr>
-            <a:xfrm>
-              <a:off x="11708856" y="6114973"/>
-              <a:ext cx="104140" cy="104140"/>
-            </a:xfrm>
-            <a:prstGeom prst="ellipse">
-              <a:avLst/>
-            </a:prstGeom>
-            <a:solidFill>
-              <a:srgbClr val="111111">
-                <a:alpha val="100000"/>
-              </a:srgbClr>
-            </a:solidFill>
-            <a:ln w="9818" cap="rnd">
-              <a:solidFill>
-                <a:srgbClr val="111111">
-                  <a:alpha val="100000"/>
-                </a:srgbClr>
-              </a:solidFill>
-              <a:prstDash val="solid"/>
-              <a:round/>
-            </a:ln>
-          </p:spPr>
-          <p:txBody>
-            <a:bodyPr/>
-            <a:lstStyle/>
-            <a:p/>
-          </p:txBody>
-        </p:sp>
-        <p:sp>
-          <p:nvSpPr>
-            <p:cNvPr id="95" name="pt95"/>
-            <p:cNvSpPr/>
-            <p:nvPr/>
-          </p:nvSpPr>
-          <p:spPr>
-            <a:xfrm>
-              <a:off x="11710166" y="5947908"/>
-              <a:ext cx="72027" cy="72027"/>
-            </a:xfrm>
-            <a:prstGeom prst="ellipse">
-              <a:avLst/>
-            </a:prstGeom>
-            <a:solidFill>
-              <a:srgbClr val="164BCE">
-                <a:alpha val="100000"/>
-              </a:srgbClr>
-            </a:solidFill>
-            <a:ln w="9818" cap="rnd">
-              <a:solidFill>
-                <a:srgbClr val="164BCE">
-                  <a:alpha val="100000"/>
-                </a:srgbClr>
-              </a:solidFill>
-              <a:prstDash val="solid"/>
-              <a:round/>
-            </a:ln>
-          </p:spPr>
-          <p:txBody>
-            <a:bodyPr/>
-            <a:lstStyle/>
-            <a:p/>
-          </p:txBody>
-        </p:sp>
-        <p:sp>
-          <p:nvSpPr>
-            <p:cNvPr id="96" name="pt96"/>
-            <p:cNvSpPr/>
-            <p:nvPr/>
-          </p:nvSpPr>
-          <p:spPr>
-            <a:xfrm>
-              <a:off x="11704017" y="5758638"/>
-              <a:ext cx="84324" cy="84324"/>
-            </a:xfrm>
-            <a:prstGeom prst="ellipse">
-              <a:avLst/>
-            </a:prstGeom>
-            <a:solidFill>
-              <a:srgbClr val="159230">
-                <a:alpha val="100000"/>
-              </a:srgbClr>
-            </a:solidFill>
-            <a:ln w="9818" cap="rnd">
-              <a:solidFill>
-                <a:srgbClr val="159230">
-                  <a:alpha val="100000"/>
-                </a:srgbClr>
-              </a:solidFill>
-              <a:prstDash val="solid"/>
-              <a:round/>
-            </a:ln>
-          </p:spPr>
-          <p:txBody>
-            <a:bodyPr/>
-            <a:lstStyle/>
-            <a:p/>
-          </p:txBody>
-        </p:sp>
-        <p:sp>
-          <p:nvSpPr>
-            <p:cNvPr id="97" name="pt97"/>
-            <p:cNvSpPr/>
-            <p:nvPr/>
-          </p:nvSpPr>
-          <p:spPr>
-            <a:xfrm>
-              <a:off x="11702335" y="5573834"/>
-              <a:ext cx="87688" cy="87688"/>
-            </a:xfrm>
-            <a:prstGeom prst="ellipse">
-              <a:avLst/>
-            </a:prstGeom>
-            <a:solidFill>
-              <a:srgbClr val="164BCE">
-                <a:alpha val="100000"/>
-              </a:srgbClr>
-            </a:solidFill>
-            <a:ln w="9818" cap="rnd">
-              <a:solidFill>
-                <a:srgbClr val="164BCE">
-                  <a:alpha val="100000"/>
-                </a:srgbClr>
-              </a:solidFill>
-              <a:prstDash val="solid"/>
-              <a:round/>
-            </a:ln>
-          </p:spPr>
-          <p:txBody>
-            <a:bodyPr/>
-            <a:lstStyle/>
-            <a:p/>
-          </p:txBody>
-        </p:sp>
-        <p:sp>
-          <p:nvSpPr>
-            <p:cNvPr id="98" name="pt98"/>
-            <p:cNvSpPr/>
-            <p:nvPr/>
-          </p:nvSpPr>
-          <p:spPr>
-            <a:xfrm>
-              <a:off x="11700770" y="5389147"/>
-              <a:ext cx="90819" cy="90819"/>
-            </a:xfrm>
-            <a:prstGeom prst="ellipse">
-              <a:avLst/>
-            </a:prstGeom>
-            <a:solidFill>
-              <a:srgbClr val="164BCE">
-                <a:alpha val="100000"/>
-              </a:srgbClr>
-            </a:solidFill>
-            <a:ln w="9818" cap="rnd">
-              <a:solidFill>
-                <a:srgbClr val="164BCE">
-                  <a:alpha val="100000"/>
-                </a:srgbClr>
-              </a:solidFill>
-              <a:prstDash val="solid"/>
-              <a:round/>
-            </a:ln>
-          </p:spPr>
-          <p:txBody>
-            <a:bodyPr/>
-            <a:lstStyle/>
-            <a:p/>
-          </p:txBody>
-        </p:sp>
-        <p:sp>
-          <p:nvSpPr>
-            <p:cNvPr id="99" name="pt99"/>
-            <p:cNvSpPr/>
-            <p:nvPr/>
-          </p:nvSpPr>
-          <p:spPr>
-            <a:xfrm>
-              <a:off x="11679169" y="5200578"/>
-              <a:ext cx="101715" cy="101715"/>
-            </a:xfrm>
-            <a:prstGeom prst="ellipse">
-              <a:avLst/>
-            </a:prstGeom>
-            <a:solidFill>
-              <a:srgbClr val="164BCE">
-                <a:alpha val="100000"/>
-              </a:srgbClr>
-            </a:solidFill>
-            <a:ln w="9818" cap="rnd">
-              <a:solidFill>
-                <a:srgbClr val="164BCE">
-                  <a:alpha val="100000"/>
-                </a:srgbClr>
-              </a:solidFill>
-              <a:prstDash val="solid"/>
-              <a:round/>
-            </a:ln>
-          </p:spPr>
-          <p:txBody>
-            <a:bodyPr/>
-            <a:lstStyle/>
-            <a:p/>
-          </p:txBody>
-        </p:sp>
-        <p:sp>
-          <p:nvSpPr>
-            <p:cNvPr id="100" name="pt100"/>
-            <p:cNvSpPr/>
-            <p:nvPr/>
-          </p:nvSpPr>
-          <p:spPr>
-            <a:xfrm>
-              <a:off x="11640918" y="5010784"/>
-              <a:ext cx="115059" cy="115059"/>
-            </a:xfrm>
-            <a:prstGeom prst="ellipse">
-              <a:avLst/>
-            </a:prstGeom>
-            <a:solidFill>
-              <a:srgbClr val="159230">
-                <a:alpha val="100000"/>
-              </a:srgbClr>
-            </a:solidFill>
-            <a:ln w="9818" cap="rnd">
-              <a:solidFill>
-                <a:srgbClr val="159230">
-                  <a:alpha val="100000"/>
-                </a:srgbClr>
-              </a:solidFill>
-              <a:prstDash val="solid"/>
-              <a:round/>
-            </a:ln>
-          </p:spPr>
-          <p:txBody>
-            <a:bodyPr/>
-            <a:lstStyle/>
-            <a:p/>
-          </p:txBody>
-        </p:sp>
-        <p:sp>
-          <p:nvSpPr>
-            <p:cNvPr id="101" name="pt101"/>
-            <p:cNvSpPr/>
-            <p:nvPr/>
-          </p:nvSpPr>
-          <p:spPr>
-            <a:xfrm>
-              <a:off x="11586415" y="4849179"/>
-              <a:ext cx="72027" cy="72027"/>
-            </a:xfrm>
-            <a:prstGeom prst="ellipse">
-              <a:avLst/>
-            </a:prstGeom>
-            <a:solidFill>
-              <a:srgbClr val="164BCE">
-                <a:alpha val="100000"/>
-              </a:srgbClr>
-            </a:solidFill>
-            <a:ln w="9818" cap="rnd">
-              <a:solidFill>
-                <a:srgbClr val="164BCE">
-                  <a:alpha val="100000"/>
-                </a:srgbClr>
-              </a:solidFill>
-              <a:prstDash val="solid"/>
-              <a:round/>
-            </a:ln>
-          </p:spPr>
-          <p:txBody>
-            <a:bodyPr/>
-            <a:lstStyle/>
-            <a:p/>
-          </p:txBody>
-        </p:sp>
-        <p:sp>
-          <p:nvSpPr>
-            <p:cNvPr id="102" name="pt102"/>
-            <p:cNvSpPr/>
-            <p:nvPr/>
-          </p:nvSpPr>
-          <p:spPr>
-            <a:xfrm>
-              <a:off x="11484288" y="4629480"/>
-              <a:ext cx="145181" cy="145181"/>
-            </a:xfrm>
-            <a:prstGeom prst="ellipse">
-              <a:avLst/>
-            </a:prstGeom>
-            <a:solidFill>
-              <a:srgbClr val="111111">
-                <a:alpha val="100000"/>
-              </a:srgbClr>
-            </a:solidFill>
-            <a:ln w="9818" cap="rnd">
-              <a:solidFill>
-                <a:srgbClr val="111111">
-                  <a:alpha val="100000"/>
-                </a:srgbClr>
-              </a:solidFill>
-              <a:prstDash val="solid"/>
-              <a:round/>
-            </a:ln>
-          </p:spPr>
-          <p:txBody>
-            <a:bodyPr/>
-            <a:lstStyle/>
-            <a:p/>
-          </p:txBody>
-        </p:sp>
-        <p:sp>
-          <p:nvSpPr>
-            <p:cNvPr id="103" name="pt103"/>
-            <p:cNvSpPr/>
-            <p:nvPr/>
-          </p:nvSpPr>
-          <p:spPr>
-            <a:xfrm>
-              <a:off x="11487669" y="4480640"/>
-              <a:ext cx="76620" cy="76620"/>
-            </a:xfrm>
-            <a:prstGeom prst="ellipse">
-              <a:avLst/>
-            </a:prstGeom>
-            <a:solidFill>
-              <a:srgbClr val="164BCE">
-                <a:alpha val="100000"/>
-              </a:srgbClr>
-            </a:solidFill>
-            <a:ln w="9818" cap="rnd">
-              <a:solidFill>
-                <a:srgbClr val="164BCE">
-                  <a:alpha val="100000"/>
-                </a:srgbClr>
-              </a:solidFill>
-              <a:prstDash val="solid"/>
-              <a:round/>
-            </a:ln>
-          </p:spPr>
-          <p:txBody>
-            <a:bodyPr/>
-            <a:lstStyle/>
-            <a:p/>
-          </p:txBody>
-        </p:sp>
-        <p:sp>
-          <p:nvSpPr>
-            <p:cNvPr id="104" name="pt104"/>
-            <p:cNvSpPr/>
-            <p:nvPr/>
-          </p:nvSpPr>
-          <p:spPr>
-            <a:xfrm>
-              <a:off x="11392939" y="4263237"/>
-              <a:ext cx="145181" cy="145181"/>
-            </a:xfrm>
-            <a:prstGeom prst="ellipse">
-              <a:avLst/>
-            </a:prstGeom>
-            <a:solidFill>
-              <a:srgbClr val="164BCE">
-                <a:alpha val="100000"/>
-              </a:srgbClr>
-            </a:solidFill>
-            <a:ln w="9818" cap="rnd">
-              <a:solidFill>
-                <a:srgbClr val="164BCE">
-                  <a:alpha val="100000"/>
-                </a:srgbClr>
-              </a:solidFill>
-              <a:prstDash val="solid"/>
-              <a:round/>
-            </a:ln>
-          </p:spPr>
-          <p:txBody>
-            <a:bodyPr/>
-            <a:lstStyle/>
-            <a:p/>
-          </p:txBody>
-        </p:sp>
-        <p:sp>
-          <p:nvSpPr>
-            <p:cNvPr id="105" name="pt105"/>
-            <p:cNvSpPr/>
-            <p:nvPr/>
-          </p:nvSpPr>
-          <p:spPr>
-            <a:xfrm>
-              <a:off x="11389384" y="4112374"/>
-              <a:ext cx="80666" cy="80666"/>
-            </a:xfrm>
-            <a:prstGeom prst="ellipse">
-              <a:avLst/>
-            </a:prstGeom>
-            <a:solidFill>
-              <a:srgbClr val="164BCE">
-                <a:alpha val="100000"/>
-              </a:srgbClr>
-            </a:solidFill>
-            <a:ln w="9818" cap="rnd">
-              <a:solidFill>
-                <a:srgbClr val="164BCE">
-                  <a:alpha val="100000"/>
-                </a:srgbClr>
-              </a:solidFill>
-              <a:prstDash val="solid"/>
-              <a:round/>
-            </a:ln>
-          </p:spPr>
-          <p:txBody>
-            <a:bodyPr/>
-            <a:lstStyle/>
-            <a:p/>
-          </p:txBody>
-        </p:sp>
-        <p:sp>
-          <p:nvSpPr>
-            <p:cNvPr id="106" name="pt106"/>
-            <p:cNvSpPr/>
-            <p:nvPr/>
-          </p:nvSpPr>
-          <p:spPr>
-            <a:xfrm>
-              <a:off x="11375599" y="3925741"/>
-              <a:ext cx="87688" cy="87688"/>
-            </a:xfrm>
-            <a:prstGeom prst="ellipse">
-              <a:avLst/>
-            </a:prstGeom>
-            <a:solidFill>
-              <a:srgbClr val="164BCE">
-                <a:alpha val="100000"/>
-              </a:srgbClr>
-            </a:solidFill>
-            <a:ln w="9818" cap="rnd">
-              <a:solidFill>
-                <a:srgbClr val="164BCE">
-                  <a:alpha val="100000"/>
-                </a:srgbClr>
-              </a:solidFill>
-              <a:prstDash val="solid"/>
-              <a:round/>
-            </a:ln>
-          </p:spPr>
-          <p:txBody>
-            <a:bodyPr/>
-            <a:lstStyle/>
-            <a:p/>
-          </p:txBody>
-        </p:sp>
-        <p:sp>
-          <p:nvSpPr>
-            <p:cNvPr id="107" name="pt107"/>
-            <p:cNvSpPr/>
-            <p:nvPr/>
-          </p:nvSpPr>
-          <p:spPr>
-            <a:xfrm>
-              <a:off x="11330354" y="3746131"/>
-              <a:ext cx="80666" cy="80666"/>
-            </a:xfrm>
-            <a:prstGeom prst="ellipse">
-              <a:avLst/>
-            </a:prstGeom>
-            <a:solidFill>
-              <a:srgbClr val="164BCE">
-                <a:alpha val="100000"/>
-              </a:srgbClr>
-            </a:solidFill>
-            <a:ln w="9818" cap="rnd">
-              <a:solidFill>
-                <a:srgbClr val="164BCE">
-                  <a:alpha val="100000"/>
-                </a:srgbClr>
-              </a:solidFill>
-              <a:prstDash val="solid"/>
-              <a:round/>
-            </a:ln>
-          </p:spPr>
-          <p:txBody>
-            <a:bodyPr/>
-            <a:lstStyle/>
-            <a:p/>
-          </p:txBody>
-        </p:sp>
-        <p:sp>
-          <p:nvSpPr>
-            <p:cNvPr id="108" name="pt108"/>
-            <p:cNvSpPr/>
-            <p:nvPr/>
-          </p:nvSpPr>
-          <p:spPr>
-            <a:xfrm>
-              <a:off x="11216072" y="3557933"/>
-              <a:ext cx="90819" cy="90819"/>
-            </a:xfrm>
-            <a:prstGeom prst="ellipse">
-              <a:avLst/>
-            </a:prstGeom>
-            <a:solidFill>
-              <a:srgbClr val="164BCE">
-                <a:alpha val="100000"/>
-              </a:srgbClr>
-            </a:solidFill>
-            <a:ln w="9818" cap="rnd">
-              <a:solidFill>
-                <a:srgbClr val="164BCE">
-                  <a:alpha val="100000"/>
-                </a:srgbClr>
-              </a:solidFill>
-              <a:prstDash val="solid"/>
-              <a:round/>
-            </a:ln>
-          </p:spPr>
-          <p:txBody>
-            <a:bodyPr/>
-            <a:lstStyle/>
-            <a:p/>
-          </p:txBody>
-        </p:sp>
-        <p:sp>
-          <p:nvSpPr>
-            <p:cNvPr id="109" name="pt109"/>
-            <p:cNvSpPr/>
-            <p:nvPr/>
-          </p:nvSpPr>
-          <p:spPr>
-            <a:xfrm>
-              <a:off x="11118642" y="3381911"/>
-              <a:ext cx="76620" cy="76620"/>
-            </a:xfrm>
-            <a:prstGeom prst="ellipse">
-              <a:avLst/>
-            </a:prstGeom>
-            <a:solidFill>
-              <a:srgbClr val="164BCE">
-                <a:alpha val="100000"/>
-              </a:srgbClr>
-            </a:solidFill>
-            <a:ln w="9818" cap="rnd">
-              <a:solidFill>
-                <a:srgbClr val="164BCE">
-                  <a:alpha val="100000"/>
-                </a:srgbClr>
-              </a:solidFill>
-              <a:prstDash val="solid"/>
-              <a:round/>
-            </a:ln>
-          </p:spPr>
-          <p:txBody>
-            <a:bodyPr/>
-            <a:lstStyle/>
-            <a:p/>
-          </p:txBody>
-        </p:sp>
-        <p:sp>
-          <p:nvSpPr>
-            <p:cNvPr id="110" name="pt110"/>
-            <p:cNvSpPr/>
-            <p:nvPr/>
-          </p:nvSpPr>
-          <p:spPr>
-            <a:xfrm>
-              <a:off x="11037472" y="3183863"/>
-              <a:ext cx="106472" cy="106472"/>
-            </a:xfrm>
-            <a:prstGeom prst="ellipse">
-              <a:avLst/>
-            </a:prstGeom>
-            <a:solidFill>
-              <a:srgbClr val="111111">
-                <a:alpha val="100000"/>
-              </a:srgbClr>
-            </a:solidFill>
-            <a:ln w="9818" cap="rnd">
-              <a:solidFill>
-                <a:srgbClr val="111111">
-                  <a:alpha val="100000"/>
-                </a:srgbClr>
-              </a:solidFill>
-              <a:prstDash val="solid"/>
-              <a:round/>
-            </a:ln>
-          </p:spPr>
-          <p:txBody>
-            <a:bodyPr/>
-            <a:lstStyle/>
-            <a:p/>
-          </p:txBody>
-        </p:sp>
-        <p:sp>
-          <p:nvSpPr>
-            <p:cNvPr id="111" name="pt111"/>
-            <p:cNvSpPr/>
-            <p:nvPr/>
-          </p:nvSpPr>
-          <p:spPr>
-            <a:xfrm>
-              <a:off x="10417162" y="3007098"/>
-              <a:ext cx="93760" cy="93760"/>
-            </a:xfrm>
-            <a:prstGeom prst="ellipse">
-              <a:avLst/>
-            </a:prstGeom>
-            <a:solidFill>
-              <a:srgbClr val="111111">
-                <a:alpha val="100000"/>
-              </a:srgbClr>
-            </a:solidFill>
-            <a:ln w="9818" cap="rnd">
-              <a:solidFill>
-                <a:srgbClr val="111111">
-                  <a:alpha val="100000"/>
-                </a:srgbClr>
-              </a:solidFill>
-              <a:prstDash val="solid"/>
-              <a:round/>
-            </a:ln>
-          </p:spPr>
-          <p:txBody>
-            <a:bodyPr/>
-            <a:lstStyle/>
-            <a:p/>
-          </p:txBody>
-        </p:sp>
-        <p:sp>
-          <p:nvSpPr>
-            <p:cNvPr id="112" name="pt112"/>
-            <p:cNvSpPr/>
-            <p:nvPr/>
-          </p:nvSpPr>
-          <p:spPr>
-            <a:xfrm>
-              <a:off x="10062119" y="2795484"/>
-              <a:ext cx="150744" cy="150744"/>
-            </a:xfrm>
-            <a:prstGeom prst="ellipse">
-              <a:avLst/>
-            </a:prstGeom>
-            <a:solidFill>
-              <a:srgbClr val="164BCE">
-                <a:alpha val="100000"/>
-              </a:srgbClr>
-            </a:solidFill>
-            <a:ln w="9818" cap="rnd">
-              <a:solidFill>
-                <a:srgbClr val="164BCE">
-                  <a:alpha val="100000"/>
-                </a:srgbClr>
-              </a:solidFill>
-              <a:prstDash val="solid"/>
-              <a:round/>
-            </a:ln>
-          </p:spPr>
-          <p:txBody>
-            <a:bodyPr/>
-            <a:lstStyle/>
-            <a:p/>
-          </p:txBody>
-        </p:sp>
-        <p:sp>
-          <p:nvSpPr>
             <p:cNvPr id="113" name="pt113"/>
             <p:cNvSpPr/>
             <p:nvPr/>
           </p:nvSpPr>
           <p:spPr>
             <a:xfrm>
-              <a:off x="9972553" y="2642325"/>
+              <a:off x="10009543" y="2642325"/>
               <a:ext cx="90819" cy="90819"/>
             </a:xfrm>
             <a:prstGeom prst="ellipse">
@@ -7540,7 +7540,93 @@
           </p:nvSpPr>
           <p:spPr>
             <a:xfrm>
-              <a:off x="7642041" y="11627997"/>
+              <a:off x="7286979" y="11627997"/>
+              <a:ext cx="1871319" cy="65379"/>
+            </a:xfrm>
+            <a:prstGeom prst="rect">
+              <a:avLst/>
+            </a:prstGeom>
+            <a:noFill/>
+          </p:spPr>
+          <p:txBody>
+            <a:bodyPr lIns="0" rIns="0" tIns="0" bIns="0" anchorCtr="1" anchor="ctr" wrap="none"/>
+            <a:lstStyle/>
+            <a:p>
+              <a:pPr algn="l" marL="0" marR="0" indent="0">
+                <a:spcBef>
+                  <a:spcPts val="0"/>
+                </a:spcBef>
+                <a:spcAft>
+                  <a:spcPts val="0"/>
+                </a:spcAft>
+              </a:pPr>
+              <a:r>
+                <a:rPr sz="720" i="0" b="0">
+                  <a:solidFill>
+                    <a:srgbClr val="164BCE">
+                      <a:alpha val="100000"/>
+                    </a:srgbClr>
+                  </a:solidFill>
+                  <a:latin typeface="Arial"/>
+                  <a:cs typeface="Arial"/>
+                </a:rPr>
+                <a:t>aspartate family amino acid metabolic process</a:t>
+              </a:r>
+            </a:p>
+          </p:txBody>
+        </p:sp>
+        <p:sp>
+          <p:nvSpPr>
+            <p:cNvPr id="117" name="tx117"/>
+            <p:cNvSpPr/>
+            <p:nvPr/>
+          </p:nvSpPr>
+          <p:spPr>
+            <a:xfrm>
+              <a:off x="7200477" y="11444875"/>
+              <a:ext cx="1957821" cy="65379"/>
+            </a:xfrm>
+            <a:prstGeom prst="rect">
+              <a:avLst/>
+            </a:prstGeom>
+            <a:noFill/>
+          </p:spPr>
+          <p:txBody>
+            <a:bodyPr lIns="0" rIns="0" tIns="0" bIns="0" anchorCtr="1" anchor="ctr" wrap="none"/>
+            <a:lstStyle/>
+            <a:p>
+              <a:pPr algn="l" marL="0" marR="0" indent="0">
+                <a:spcBef>
+                  <a:spcPts val="0"/>
+                </a:spcBef>
+                <a:spcAft>
+                  <a:spcPts val="0"/>
+                </a:spcAft>
+              </a:pPr>
+              <a:r>
+                <a:rPr sz="720" i="0" b="0">
+                  <a:solidFill>
+                    <a:srgbClr val="164BCE">
+                      <a:alpha val="100000"/>
+                    </a:srgbClr>
+                  </a:solidFill>
+                  <a:latin typeface="Arial"/>
+                  <a:cs typeface="Arial"/>
+                </a:rPr>
+                <a:t>non-proteinogenic amino acid metabolic process</a:t>
+              </a:r>
+            </a:p>
+          </p:txBody>
+        </p:sp>
+        <p:sp>
+          <p:nvSpPr>
+            <p:cNvPr id="118" name="tx118"/>
+            <p:cNvSpPr/>
+            <p:nvPr/>
+          </p:nvSpPr>
+          <p:spPr>
+            <a:xfrm>
+              <a:off x="7642041" y="11261754"/>
               <a:ext cx="1516258" cy="65379"/>
             </a:xfrm>
             <a:prstGeom prst="rect">
@@ -7577,13 +7663,56 @@
         </p:sp>
         <p:sp>
           <p:nvSpPr>
-            <p:cNvPr id="117" name="tx117"/>
-            <p:cNvSpPr/>
-            <p:nvPr/>
-          </p:nvSpPr>
-          <p:spPr>
-            <a:xfrm>
-              <a:off x="8088176" y="11444875"/>
+            <p:cNvPr id="119" name="tx119"/>
+            <p:cNvSpPr/>
+            <p:nvPr/>
+          </p:nvSpPr>
+          <p:spPr>
+            <a:xfrm>
+              <a:off x="7616255" y="11078633"/>
+              <a:ext cx="1542044" cy="65379"/>
+            </a:xfrm>
+            <a:prstGeom prst="rect">
+              <a:avLst/>
+            </a:prstGeom>
+            <a:noFill/>
+          </p:spPr>
+          <p:txBody>
+            <a:bodyPr lIns="0" rIns="0" tIns="0" bIns="0" anchorCtr="1" anchor="ctr" wrap="none"/>
+            <a:lstStyle/>
+            <a:p>
+              <a:pPr algn="l" marL="0" marR="0" indent="0">
+                <a:spcBef>
+                  <a:spcPts val="0"/>
+                </a:spcBef>
+                <a:spcAft>
+                  <a:spcPts val="0"/>
+                </a:spcAft>
+              </a:pPr>
+              <a:r>
+                <a:rPr sz="720" i="0" b="0">
+                  <a:solidFill>
+                    <a:srgbClr val="111111">
+                      <a:alpha val="100000"/>
+                    </a:srgbClr>
+                  </a:solidFill>
+                  <a:latin typeface="Arial"/>
+                  <a:cs typeface="Arial"/>
+                </a:rPr>
+                <a:t>ribonucleoprotein complex localization</a:t>
+              </a:r>
+            </a:p>
+          </p:txBody>
+        </p:sp>
+        <p:sp>
+          <p:nvSpPr>
+            <p:cNvPr id="120" name="tx120"/>
+            <p:cNvSpPr/>
+            <p:nvPr/>
+          </p:nvSpPr>
+          <p:spPr>
+            <a:xfrm>
+              <a:off x="8088176" y="10895511"/>
               <a:ext cx="1070122" cy="65379"/>
             </a:xfrm>
             <a:prstGeom prst="rect">
@@ -7620,142 +7749,13 @@
         </p:sp>
         <p:sp>
           <p:nvSpPr>
-            <p:cNvPr id="118" name="tx118"/>
-            <p:cNvSpPr/>
-            <p:nvPr/>
-          </p:nvSpPr>
-          <p:spPr>
-            <a:xfrm>
-              <a:off x="7616255" y="11261754"/>
-              <a:ext cx="1542044" cy="65379"/>
-            </a:xfrm>
-            <a:prstGeom prst="rect">
-              <a:avLst/>
-            </a:prstGeom>
-            <a:noFill/>
-          </p:spPr>
-          <p:txBody>
-            <a:bodyPr lIns="0" rIns="0" tIns="0" bIns="0" anchorCtr="1" anchor="ctr" wrap="none"/>
-            <a:lstStyle/>
-            <a:p>
-              <a:pPr algn="l" marL="0" marR="0" indent="0">
-                <a:spcBef>
-                  <a:spcPts val="0"/>
-                </a:spcBef>
-                <a:spcAft>
-                  <a:spcPts val="0"/>
-                </a:spcAft>
-              </a:pPr>
-              <a:r>
-                <a:rPr sz="720" i="0" b="0">
-                  <a:solidFill>
-                    <a:srgbClr val="111111">
-                      <a:alpha val="100000"/>
-                    </a:srgbClr>
-                  </a:solidFill>
-                  <a:latin typeface="Arial"/>
-                  <a:cs typeface="Arial"/>
-                </a:rPr>
-                <a:t>ribonucleoprotein complex localization</a:t>
-              </a:r>
-            </a:p>
-          </p:txBody>
-        </p:sp>
-        <p:sp>
-          <p:nvSpPr>
-            <p:cNvPr id="119" name="tx119"/>
-            <p:cNvSpPr/>
-            <p:nvPr/>
-          </p:nvSpPr>
-          <p:spPr>
-            <a:xfrm>
-              <a:off x="7200660" y="11029255"/>
-              <a:ext cx="1957638" cy="65379"/>
-            </a:xfrm>
-            <a:prstGeom prst="rect">
-              <a:avLst/>
-            </a:prstGeom>
-            <a:noFill/>
-          </p:spPr>
-          <p:txBody>
-            <a:bodyPr lIns="0" rIns="0" tIns="0" bIns="0" anchorCtr="1" anchor="ctr" wrap="none"/>
-            <a:lstStyle/>
-            <a:p>
-              <a:pPr algn="l" marL="0" marR="0" indent="0">
-                <a:spcBef>
-                  <a:spcPts val="0"/>
-                </a:spcBef>
-                <a:spcAft>
-                  <a:spcPts val="0"/>
-                </a:spcAft>
-              </a:pPr>
-              <a:r>
-                <a:rPr sz="720" i="0" b="0">
-                  <a:solidFill>
-                    <a:srgbClr val="111111">
-                      <a:alpha val="100000"/>
-                    </a:srgbClr>
-                  </a:solidFill>
-                  <a:latin typeface="Arial"/>
-                  <a:cs typeface="Arial"/>
-                </a:rPr>
-                <a:t>endoplasmic reticulum to Golgi vesicle-mediated</a:t>
-              </a:r>
-            </a:p>
-          </p:txBody>
-        </p:sp>
-        <p:sp>
-          <p:nvSpPr>
-            <p:cNvPr id="120" name="tx120"/>
-            <p:cNvSpPr/>
-            <p:nvPr/>
-          </p:nvSpPr>
-          <p:spPr>
-            <a:xfrm>
-              <a:off x="8798299" y="11128010"/>
-              <a:ext cx="359999" cy="65379"/>
-            </a:xfrm>
-            <a:prstGeom prst="rect">
-              <a:avLst/>
-            </a:prstGeom>
-            <a:noFill/>
-          </p:spPr>
-          <p:txBody>
-            <a:bodyPr lIns="0" rIns="0" tIns="0" bIns="0" anchorCtr="1" anchor="ctr" wrap="none"/>
-            <a:lstStyle/>
-            <a:p>
-              <a:pPr algn="l" marL="0" marR="0" indent="0">
-                <a:spcBef>
-                  <a:spcPts val="0"/>
-                </a:spcBef>
-                <a:spcAft>
-                  <a:spcPts val="0"/>
-                </a:spcAft>
-              </a:pPr>
-              <a:r>
-                <a:rPr sz="720" i="0" b="0">
-                  <a:solidFill>
-                    <a:srgbClr val="111111">
-                      <a:alpha val="100000"/>
-                    </a:srgbClr>
-                  </a:solidFill>
-                  <a:latin typeface="Arial"/>
-                  <a:cs typeface="Arial"/>
-                </a:rPr>
-                <a:t>transport</a:t>
-              </a:r>
-            </a:p>
-          </p:txBody>
-        </p:sp>
-        <p:sp>
-          <p:nvSpPr>
             <p:cNvPr id="121" name="tx121"/>
             <p:cNvSpPr/>
             <p:nvPr/>
           </p:nvSpPr>
           <p:spPr>
             <a:xfrm>
-              <a:off x="8027369" y="10895511"/>
+              <a:off x="8027369" y="10712390"/>
               <a:ext cx="1130929" cy="65379"/>
             </a:xfrm>
             <a:prstGeom prst="rect">
@@ -7798,7 +7798,7 @@
           </p:nvSpPr>
           <p:spPr>
             <a:xfrm>
-              <a:off x="7829767" y="10712390"/>
+              <a:off x="7829767" y="10529268"/>
               <a:ext cx="1328531" cy="65379"/>
             </a:xfrm>
             <a:prstGeom prst="rect">
@@ -7841,7 +7841,7 @@
           </p:nvSpPr>
           <p:spPr>
             <a:xfrm>
-              <a:off x="8539433" y="10529268"/>
+              <a:off x="8539433" y="10346147"/>
               <a:ext cx="618865" cy="65379"/>
             </a:xfrm>
             <a:prstGeom prst="rect">
@@ -7884,7 +7884,7 @@
           </p:nvSpPr>
           <p:spPr>
             <a:xfrm>
-              <a:off x="8017036" y="10346147"/>
+              <a:off x="8017036" y="10163025"/>
               <a:ext cx="1141262" cy="65379"/>
             </a:xfrm>
             <a:prstGeom prst="rect">
@@ -7927,7 +7927,7 @@
           </p:nvSpPr>
           <p:spPr>
             <a:xfrm>
-              <a:off x="7956320" y="10163025"/>
+              <a:off x="7956320" y="9979904"/>
               <a:ext cx="1201978" cy="65379"/>
             </a:xfrm>
             <a:prstGeom prst="rect">
@@ -7970,7 +7970,7 @@
           </p:nvSpPr>
           <p:spPr>
             <a:xfrm>
-              <a:off x="7388386" y="9930526"/>
+              <a:off x="7388386" y="9747405"/>
               <a:ext cx="1769912" cy="65379"/>
             </a:xfrm>
             <a:prstGeom prst="rect">
@@ -8013,7 +8013,7 @@
           </p:nvSpPr>
           <p:spPr>
             <a:xfrm>
-              <a:off x="8823628" y="10029281"/>
+              <a:off x="8823628" y="9846160"/>
               <a:ext cx="334670" cy="65379"/>
             </a:xfrm>
             <a:prstGeom prst="rect">
@@ -8056,49 +8056,6 @@
           </p:nvSpPr>
           <p:spPr>
             <a:xfrm>
-              <a:off x="8407851" y="9796782"/>
-              <a:ext cx="750448" cy="65379"/>
-            </a:xfrm>
-            <a:prstGeom prst="rect">
-              <a:avLst/>
-            </a:prstGeom>
-            <a:noFill/>
-          </p:spPr>
-          <p:txBody>
-            <a:bodyPr lIns="0" rIns="0" tIns="0" bIns="0" anchorCtr="1" anchor="ctr" wrap="none"/>
-            <a:lstStyle/>
-            <a:p>
-              <a:pPr algn="l" marL="0" marR="0" indent="0">
-                <a:spcBef>
-                  <a:spcPts val="0"/>
-                </a:spcBef>
-                <a:spcAft>
-                  <a:spcPts val="0"/>
-                </a:spcAft>
-              </a:pPr>
-              <a:r>
-                <a:rPr sz="720" i="0" b="0">
-                  <a:solidFill>
-                    <a:srgbClr val="164BCE">
-                      <a:alpha val="100000"/>
-                    </a:srgbClr>
-                  </a:solidFill>
-                  <a:latin typeface="Arial"/>
-                  <a:cs typeface="Arial"/>
-                </a:rPr>
-                <a:t>fatty acid transport</a:t>
-              </a:r>
-            </a:p>
-          </p:txBody>
-        </p:sp>
-        <p:sp>
-          <p:nvSpPr>
-            <p:cNvPr id="129" name="tx129"/>
-            <p:cNvSpPr/>
-            <p:nvPr/>
-          </p:nvSpPr>
-          <p:spPr>
-            <a:xfrm>
               <a:off x="8397426" y="9613661"/>
               <a:ext cx="760872" cy="65379"/>
             </a:xfrm>
@@ -8136,14 +8093,14 @@
         </p:sp>
         <p:sp>
           <p:nvSpPr>
-            <p:cNvPr id="130" name="tx130"/>
-            <p:cNvSpPr/>
-            <p:nvPr/>
-          </p:nvSpPr>
-          <p:spPr>
-            <a:xfrm>
-              <a:off x="7865063" y="9430539"/>
-              <a:ext cx="1293235" cy="65379"/>
+            <p:cNvPr id="129" name="tx129"/>
+            <p:cNvSpPr/>
+            <p:nvPr/>
+          </p:nvSpPr>
+          <p:spPr>
+            <a:xfrm>
+              <a:off x="7829493" y="9430539"/>
+              <a:ext cx="1328806" cy="65379"/>
             </a:xfrm>
             <a:prstGeom prst="rect">
               <a:avLst/>
@@ -8172,20 +8129,106 @@
                   <a:latin typeface="Arial"/>
                   <a:cs typeface="Arial"/>
                 </a:rPr>
-                <a:t>carbohydrate metabolic process</a:t>
+                <a:t>carboxylic acid catabolic process</a:t>
               </a:r>
             </a:p>
           </p:txBody>
         </p:sp>
         <p:sp>
           <p:nvSpPr>
+            <p:cNvPr id="130" name="tx130"/>
+            <p:cNvSpPr/>
+            <p:nvPr/>
+          </p:nvSpPr>
+          <p:spPr>
+            <a:xfrm>
+              <a:off x="7611317" y="9247418"/>
+              <a:ext cx="1546981" cy="65379"/>
+            </a:xfrm>
+            <a:prstGeom prst="rect">
+              <a:avLst/>
+            </a:prstGeom>
+            <a:noFill/>
+          </p:spPr>
+          <p:txBody>
+            <a:bodyPr lIns="0" rIns="0" tIns="0" bIns="0" anchorCtr="1" anchor="ctr" wrap="none"/>
+            <a:lstStyle/>
+            <a:p>
+              <a:pPr algn="l" marL="0" marR="0" indent="0">
+                <a:spcBef>
+                  <a:spcPts val="0"/>
+                </a:spcBef>
+                <a:spcAft>
+                  <a:spcPts val="0"/>
+                </a:spcAft>
+              </a:pPr>
+              <a:r>
+                <a:rPr sz="720" i="0" b="0">
+                  <a:solidFill>
+                    <a:srgbClr val="164BCE">
+                      <a:alpha val="100000"/>
+                    </a:srgbClr>
+                  </a:solidFill>
+                  <a:latin typeface="Arial"/>
+                  <a:cs typeface="Arial"/>
+                </a:rPr>
+                <a:t>alpha-amino acid biosynthetic process</a:t>
+              </a:r>
+            </a:p>
+          </p:txBody>
+        </p:sp>
+        <p:sp>
+          <p:nvSpPr>
             <p:cNvPr id="131" name="tx131"/>
             <p:cNvSpPr/>
             <p:nvPr/>
           </p:nvSpPr>
           <p:spPr>
             <a:xfrm>
-              <a:off x="7941141" y="9247418"/>
+              <a:off x="8341648" y="9064296"/>
+              <a:ext cx="816650" cy="65379"/>
+            </a:xfrm>
+            <a:prstGeom prst="rect">
+              <a:avLst/>
+            </a:prstGeom>
+            <a:noFill/>
+          </p:spPr>
+          <p:txBody>
+            <a:bodyPr lIns="0" rIns="0" tIns="0" bIns="0" anchorCtr="1" anchor="ctr" wrap="none"/>
+            <a:lstStyle/>
+            <a:p>
+              <a:pPr algn="l" marL="0" marR="0" indent="0">
+                <a:spcBef>
+                  <a:spcPts val="0"/>
+                </a:spcBef>
+                <a:spcAft>
+                  <a:spcPts val="0"/>
+                </a:spcAft>
+              </a:pPr>
+              <a:r>
+                <a:rPr sz="720" i="0" b="0">
+                  <a:solidFill>
+                    <a:srgbClr val="159230">
+                      <a:alpha val="100000"/>
+                    </a:srgbClr>
+                  </a:solidFill>
+                  <a:latin typeface="Arial"/>
+                  <a:cs typeface="Arial"/>
+                </a:rPr>
+                <a:t>response to hypoxia</a:t>
+              </a:r>
+            </a:p>
+          </p:txBody>
+        </p:sp>
+        <p:sp>
+          <p:nvSpPr>
+            <p:cNvPr id="132" name="tx132"/>
+            <p:cNvSpPr/>
+            <p:nvPr/>
+          </p:nvSpPr>
+          <p:spPr>
+            <a:xfrm>
+              <a:off x="7941141" y="8881175"/>
               <a:ext cx="1217157" cy="65379"/>
             </a:xfrm>
             <a:prstGeom prst="rect">
@@ -8222,14 +8265,14 @@
         </p:sp>
         <p:sp>
           <p:nvSpPr>
-            <p:cNvPr id="132" name="tx132"/>
-            <p:cNvSpPr/>
-            <p:nvPr/>
-          </p:nvSpPr>
-          <p:spPr>
-            <a:xfrm>
-              <a:off x="7611317" y="9064296"/>
-              <a:ext cx="1546981" cy="65379"/>
+            <p:cNvPr id="133" name="tx133"/>
+            <p:cNvSpPr/>
+            <p:nvPr/>
+          </p:nvSpPr>
+          <p:spPr>
+            <a:xfrm>
+              <a:off x="7590926" y="8698054"/>
+              <a:ext cx="1567373" cy="65379"/>
             </a:xfrm>
             <a:prstGeom prst="rect">
               <a:avLst/>
@@ -8251,70 +8294,27 @@
               <a:r>
                 <a:rPr sz="720" i="0" b="0">
                   <a:solidFill>
-                    <a:srgbClr val="164BCE">
+                    <a:srgbClr val="111111">
                       <a:alpha val="100000"/>
                     </a:srgbClr>
                   </a:solidFill>
                   <a:latin typeface="Arial"/>
                   <a:cs typeface="Arial"/>
                 </a:rPr>
-                <a:t>alpha-amino acid biosynthetic process</a:t>
+                <a:t>protein-containing complex localization</a:t>
               </a:r>
             </a:p>
           </p:txBody>
         </p:sp>
         <p:sp>
           <p:nvSpPr>
-            <p:cNvPr id="133" name="tx133"/>
-            <p:cNvSpPr/>
-            <p:nvPr/>
-          </p:nvSpPr>
-          <p:spPr>
-            <a:xfrm>
-              <a:off x="8341648" y="8881175"/>
-              <a:ext cx="816650" cy="65379"/>
-            </a:xfrm>
-            <a:prstGeom prst="rect">
-              <a:avLst/>
-            </a:prstGeom>
-            <a:noFill/>
-          </p:spPr>
-          <p:txBody>
-            <a:bodyPr lIns="0" rIns="0" tIns="0" bIns="0" anchorCtr="1" anchor="ctr" wrap="none"/>
-            <a:lstStyle/>
-            <a:p>
-              <a:pPr algn="l" marL="0" marR="0" indent="0">
-                <a:spcBef>
-                  <a:spcPts val="0"/>
-                </a:spcBef>
-                <a:spcAft>
-                  <a:spcPts val="0"/>
-                </a:spcAft>
-              </a:pPr>
-              <a:r>
-                <a:rPr sz="720" i="0" b="0">
-                  <a:solidFill>
-                    <a:srgbClr val="159230">
-                      <a:alpha val="100000"/>
-                    </a:srgbClr>
-                  </a:solidFill>
-                  <a:latin typeface="Arial"/>
-                  <a:cs typeface="Arial"/>
-                </a:rPr>
-                <a:t>response to hypoxia</a:t>
-              </a:r>
-            </a:p>
-          </p:txBody>
-        </p:sp>
-        <p:sp>
-          <p:nvSpPr>
             <p:cNvPr id="134" name="tx134"/>
             <p:cNvSpPr/>
             <p:nvPr/>
           </p:nvSpPr>
           <p:spPr>
             <a:xfrm>
-              <a:off x="7555538" y="8698054"/>
+              <a:off x="7555538" y="8514932"/>
               <a:ext cx="1602760" cy="65379"/>
             </a:xfrm>
             <a:prstGeom prst="rect">
@@ -8357,49 +8357,6 @@
           </p:nvSpPr>
           <p:spPr>
             <a:xfrm>
-              <a:off x="7590926" y="8514932"/>
-              <a:ext cx="1567373" cy="65379"/>
-            </a:xfrm>
-            <a:prstGeom prst="rect">
-              <a:avLst/>
-            </a:prstGeom>
-            <a:noFill/>
-          </p:spPr>
-          <p:txBody>
-            <a:bodyPr lIns="0" rIns="0" tIns="0" bIns="0" anchorCtr="1" anchor="ctr" wrap="none"/>
-            <a:lstStyle/>
-            <a:p>
-              <a:pPr algn="l" marL="0" marR="0" indent="0">
-                <a:spcBef>
-                  <a:spcPts val="0"/>
-                </a:spcBef>
-                <a:spcAft>
-                  <a:spcPts val="0"/>
-                </a:spcAft>
-              </a:pPr>
-              <a:r>
-                <a:rPr sz="720" i="0" b="0">
-                  <a:solidFill>
-                    <a:srgbClr val="111111">
-                      <a:alpha val="100000"/>
-                    </a:srgbClr>
-                  </a:solidFill>
-                  <a:latin typeface="Arial"/>
-                  <a:cs typeface="Arial"/>
-                </a:rPr>
-                <a:t>protein-containing complex localization</a:t>
-              </a:r>
-            </a:p>
-          </p:txBody>
-        </p:sp>
-        <p:sp>
-          <p:nvSpPr>
-            <p:cNvPr id="136" name="tx136"/>
-            <p:cNvSpPr/>
-            <p:nvPr/>
-          </p:nvSpPr>
-          <p:spPr>
-            <a:xfrm>
               <a:off x="8372098" y="8331811"/>
               <a:ext cx="786201" cy="65379"/>
             </a:xfrm>
@@ -8437,7 +8394,7 @@
         </p:sp>
         <p:sp>
           <p:nvSpPr>
-            <p:cNvPr id="137" name="tx137"/>
+            <p:cNvPr id="136" name="tx136"/>
             <p:cNvSpPr/>
             <p:nvPr/>
           </p:nvSpPr>
@@ -8480,7 +8437,7 @@
         </p:sp>
         <p:sp>
           <p:nvSpPr>
-            <p:cNvPr id="138" name="tx138"/>
+            <p:cNvPr id="137" name="tx137"/>
             <p:cNvSpPr/>
             <p:nvPr/>
           </p:nvSpPr>
@@ -8523,7 +8480,7 @@
         </p:sp>
         <p:sp>
           <p:nvSpPr>
-            <p:cNvPr id="139" name="tx139"/>
+            <p:cNvPr id="138" name="tx138"/>
             <p:cNvSpPr/>
             <p:nvPr/>
           </p:nvSpPr>
@@ -8566,7 +8523,7 @@
         </p:sp>
         <p:sp>
           <p:nvSpPr>
-            <p:cNvPr id="140" name="tx140"/>
+            <p:cNvPr id="139" name="tx139"/>
             <p:cNvSpPr/>
             <p:nvPr/>
           </p:nvSpPr>
@@ -8609,7 +8566,7 @@
         </p:sp>
         <p:sp>
           <p:nvSpPr>
-            <p:cNvPr id="141" name="tx141"/>
+            <p:cNvPr id="140" name="tx140"/>
             <p:cNvSpPr/>
             <p:nvPr/>
           </p:nvSpPr>
@@ -8652,13 +8609,56 @@
         </p:sp>
         <p:sp>
           <p:nvSpPr>
+            <p:cNvPr id="141" name="tx141"/>
+            <p:cNvSpPr/>
+            <p:nvPr/>
+          </p:nvSpPr>
+          <p:spPr>
+            <a:xfrm>
+              <a:off x="7418836" y="7233082"/>
+              <a:ext cx="1739463" cy="65379"/>
+            </a:xfrm>
+            <a:prstGeom prst="rect">
+              <a:avLst/>
+            </a:prstGeom>
+            <a:noFill/>
+          </p:spPr>
+          <p:txBody>
+            <a:bodyPr lIns="0" rIns="0" tIns="0" bIns="0" anchorCtr="1" anchor="ctr" wrap="none"/>
+            <a:lstStyle/>
+            <a:p>
+              <a:pPr algn="l" marL="0" marR="0" indent="0">
+                <a:spcBef>
+                  <a:spcPts val="0"/>
+                </a:spcBef>
+                <a:spcAft>
+                  <a:spcPts val="0"/>
+                </a:spcAft>
+              </a:pPr>
+              <a:r>
+                <a:rPr sz="720" i="0" b="0">
+                  <a:solidFill>
+                    <a:srgbClr val="164BCE">
+                      <a:alpha val="100000"/>
+                    </a:srgbClr>
+                  </a:solidFill>
+                  <a:latin typeface="Arial"/>
+                  <a:cs typeface="Arial"/>
+                </a:rPr>
+                <a:t>serine family amino acid metabolic process</a:t>
+              </a:r>
+            </a:p>
+          </p:txBody>
+        </p:sp>
+        <p:sp>
+          <p:nvSpPr>
             <p:cNvPr id="142" name="tx142"/>
             <p:cNvSpPr/>
             <p:nvPr/>
           </p:nvSpPr>
           <p:spPr>
             <a:xfrm>
-              <a:off x="7707786" y="7233082"/>
+              <a:off x="7707786" y="7049960"/>
               <a:ext cx="1450512" cy="65379"/>
             </a:xfrm>
             <a:prstGeom prst="rect">
@@ -8701,49 +8701,6 @@
           </p:nvSpPr>
           <p:spPr>
             <a:xfrm>
-              <a:off x="7418836" y="7049960"/>
-              <a:ext cx="1739463" cy="65379"/>
-            </a:xfrm>
-            <a:prstGeom prst="rect">
-              <a:avLst/>
-            </a:prstGeom>
-            <a:noFill/>
-          </p:spPr>
-          <p:txBody>
-            <a:bodyPr lIns="0" rIns="0" tIns="0" bIns="0" anchorCtr="1" anchor="ctr" wrap="none"/>
-            <a:lstStyle/>
-            <a:p>
-              <a:pPr algn="l" marL="0" marR="0" indent="0">
-                <a:spcBef>
-                  <a:spcPts val="0"/>
-                </a:spcBef>
-                <a:spcAft>
-                  <a:spcPts val="0"/>
-                </a:spcAft>
-              </a:pPr>
-              <a:r>
-                <a:rPr sz="720" i="0" b="0">
-                  <a:solidFill>
-                    <a:srgbClr val="164BCE">
-                      <a:alpha val="100000"/>
-                    </a:srgbClr>
-                  </a:solidFill>
-                  <a:latin typeface="Arial"/>
-                  <a:cs typeface="Arial"/>
-                </a:rPr>
-                <a:t>serine family amino acid metabolic process</a:t>
-              </a:r>
-            </a:p>
-          </p:txBody>
-        </p:sp>
-        <p:sp>
-          <p:nvSpPr>
-            <p:cNvPr id="144" name="tx144"/>
-            <p:cNvSpPr/>
-            <p:nvPr/>
-          </p:nvSpPr>
-          <p:spPr>
-            <a:xfrm>
               <a:off x="7570900" y="6866839"/>
               <a:ext cx="1587398" cy="65379"/>
             </a:xfrm>
@@ -8781,7 +8738,7 @@
         </p:sp>
         <p:sp>
           <p:nvSpPr>
-            <p:cNvPr id="145" name="tx145"/>
+            <p:cNvPr id="144" name="tx144"/>
             <p:cNvSpPr/>
             <p:nvPr/>
           </p:nvSpPr>
@@ -8824,7 +8781,7 @@
         </p:sp>
         <p:sp>
           <p:nvSpPr>
-            <p:cNvPr id="146" name="tx146"/>
+            <p:cNvPr id="145" name="tx145"/>
             <p:cNvSpPr/>
             <p:nvPr/>
           </p:nvSpPr>
@@ -8867,7 +8824,7 @@
         </p:sp>
         <p:sp>
           <p:nvSpPr>
-            <p:cNvPr id="147" name="tx147"/>
+            <p:cNvPr id="146" name="tx146"/>
             <p:cNvSpPr/>
             <p:nvPr/>
           </p:nvSpPr>
@@ -8910,13 +8867,99 @@
         </p:sp>
         <p:sp>
           <p:nvSpPr>
+            <p:cNvPr id="147" name="tx147"/>
+            <p:cNvSpPr/>
+            <p:nvPr/>
+          </p:nvSpPr>
+          <p:spPr>
+            <a:xfrm>
+              <a:off x="7905571" y="6317475"/>
+              <a:ext cx="1252728" cy="65379"/>
+            </a:xfrm>
+            <a:prstGeom prst="rect">
+              <a:avLst/>
+            </a:prstGeom>
+            <a:noFill/>
+          </p:spPr>
+          <p:txBody>
+            <a:bodyPr lIns="0" rIns="0" tIns="0" bIns="0" anchorCtr="1" anchor="ctr" wrap="none"/>
+            <a:lstStyle/>
+            <a:p>
+              <a:pPr algn="l" marL="0" marR="0" indent="0">
+                <a:spcBef>
+                  <a:spcPts val="0"/>
+                </a:spcBef>
+                <a:spcAft>
+                  <a:spcPts val="0"/>
+                </a:spcAft>
+              </a:pPr>
+              <a:r>
+                <a:rPr sz="720" i="0" b="0">
+                  <a:solidFill>
+                    <a:srgbClr val="111111">
+                      <a:alpha val="100000"/>
+                    </a:srgbClr>
+                  </a:solidFill>
+                  <a:latin typeface="Arial"/>
+                  <a:cs typeface="Arial"/>
+                </a:rPr>
+                <a:t>glycoprotein metabolic process</a:t>
+              </a:r>
+            </a:p>
+          </p:txBody>
+        </p:sp>
+        <p:sp>
+          <p:nvSpPr>
             <p:cNvPr id="148" name="tx148"/>
             <p:cNvSpPr/>
             <p:nvPr/>
           </p:nvSpPr>
           <p:spPr>
             <a:xfrm>
-              <a:off x="7413441" y="6317475"/>
+              <a:off x="8204854" y="6134353"/>
+              <a:ext cx="953444" cy="65379"/>
+            </a:xfrm>
+            <a:prstGeom prst="rect">
+              <a:avLst/>
+            </a:prstGeom>
+            <a:noFill/>
+          </p:spPr>
+          <p:txBody>
+            <a:bodyPr lIns="0" rIns="0" tIns="0" bIns="0" anchorCtr="1" anchor="ctr" wrap="none"/>
+            <a:lstStyle/>
+            <a:p>
+              <a:pPr algn="l" marL="0" marR="0" indent="0">
+                <a:spcBef>
+                  <a:spcPts val="0"/>
+                </a:spcBef>
+                <a:spcAft>
+                  <a:spcPts val="0"/>
+                </a:spcAft>
+              </a:pPr>
+              <a:r>
+                <a:rPr sz="720" i="0" b="0">
+                  <a:solidFill>
+                    <a:srgbClr val="164BCE">
+                      <a:alpha val="100000"/>
+                    </a:srgbClr>
+                  </a:solidFill>
+                  <a:latin typeface="Arial"/>
+                  <a:cs typeface="Arial"/>
+                </a:rPr>
+                <a:t>NAD metabolic process</a:t>
+              </a:r>
+            </a:p>
+          </p:txBody>
+        </p:sp>
+        <p:sp>
+          <p:nvSpPr>
+            <p:cNvPr id="149" name="tx149"/>
+            <p:cNvSpPr/>
+            <p:nvPr/>
+          </p:nvSpPr>
+          <p:spPr>
+            <a:xfrm>
+              <a:off x="7413441" y="5951232"/>
               <a:ext cx="1744858" cy="65379"/>
             </a:xfrm>
             <a:prstGeom prst="rect">
@@ -8953,93 +8996,7 @@
         </p:sp>
         <p:sp>
           <p:nvSpPr>
-            <p:cNvPr id="149" name="tx149"/>
-            <p:cNvSpPr/>
-            <p:nvPr/>
-          </p:nvSpPr>
-          <p:spPr>
-            <a:xfrm>
-              <a:off x="7905571" y="6134353"/>
-              <a:ext cx="1252728" cy="65379"/>
-            </a:xfrm>
-            <a:prstGeom prst="rect">
-              <a:avLst/>
-            </a:prstGeom>
-            <a:noFill/>
-          </p:spPr>
-          <p:txBody>
-            <a:bodyPr lIns="0" rIns="0" tIns="0" bIns="0" anchorCtr="1" anchor="ctr" wrap="none"/>
-            <a:lstStyle/>
-            <a:p>
-              <a:pPr algn="l" marL="0" marR="0" indent="0">
-                <a:spcBef>
-                  <a:spcPts val="0"/>
-                </a:spcBef>
-                <a:spcAft>
-                  <a:spcPts val="0"/>
-                </a:spcAft>
-              </a:pPr>
-              <a:r>
-                <a:rPr sz="720" i="0" b="0">
-                  <a:solidFill>
-                    <a:srgbClr val="111111">
-                      <a:alpha val="100000"/>
-                    </a:srgbClr>
-                  </a:solidFill>
-                  <a:latin typeface="Arial"/>
-                  <a:cs typeface="Arial"/>
-                </a:rPr>
-                <a:t>glycoprotein metabolic process</a:t>
-              </a:r>
-            </a:p>
-          </p:txBody>
-        </p:sp>
-        <p:sp>
-          <p:nvSpPr>
             <p:cNvPr id="150" name="tx150"/>
-            <p:cNvSpPr/>
-            <p:nvPr/>
-          </p:nvSpPr>
-          <p:spPr>
-            <a:xfrm>
-              <a:off x="8204854" y="5951232"/>
-              <a:ext cx="953444" cy="65379"/>
-            </a:xfrm>
-            <a:prstGeom prst="rect">
-              <a:avLst/>
-            </a:prstGeom>
-            <a:noFill/>
-          </p:spPr>
-          <p:txBody>
-            <a:bodyPr lIns="0" rIns="0" tIns="0" bIns="0" anchorCtr="1" anchor="ctr" wrap="none"/>
-            <a:lstStyle/>
-            <a:p>
-              <a:pPr algn="l" marL="0" marR="0" indent="0">
-                <a:spcBef>
-                  <a:spcPts val="0"/>
-                </a:spcBef>
-                <a:spcAft>
-                  <a:spcPts val="0"/>
-                </a:spcAft>
-              </a:pPr>
-              <a:r>
-                <a:rPr sz="720" i="0" b="0">
-                  <a:solidFill>
-                    <a:srgbClr val="164BCE">
-                      <a:alpha val="100000"/>
-                    </a:srgbClr>
-                  </a:solidFill>
-                  <a:latin typeface="Arial"/>
-                  <a:cs typeface="Arial"/>
-                </a:rPr>
-                <a:t>NAD metabolic process</a:t>
-              </a:r>
-            </a:p>
-          </p:txBody>
-        </p:sp>
-        <p:sp>
-          <p:nvSpPr>
-            <p:cNvPr id="151" name="tx151"/>
             <p:cNvSpPr/>
             <p:nvPr/>
           </p:nvSpPr>
@@ -9082,13 +9039,142 @@
         </p:sp>
         <p:sp>
           <p:nvSpPr>
+            <p:cNvPr id="151" name="tx151"/>
+            <p:cNvSpPr/>
+            <p:nvPr/>
+          </p:nvSpPr>
+          <p:spPr>
+            <a:xfrm>
+              <a:off x="7109037" y="5535611"/>
+              <a:ext cx="2049261" cy="65379"/>
+            </a:xfrm>
+            <a:prstGeom prst="rect">
+              <a:avLst/>
+            </a:prstGeom>
+            <a:noFill/>
+          </p:spPr>
+          <p:txBody>
+            <a:bodyPr lIns="0" rIns="0" tIns="0" bIns="0" anchorCtr="1" anchor="ctr" wrap="none"/>
+            <a:lstStyle/>
+            <a:p>
+              <a:pPr algn="l" marL="0" marR="0" indent="0">
+                <a:spcBef>
+                  <a:spcPts val="0"/>
+                </a:spcBef>
+                <a:spcAft>
+                  <a:spcPts val="0"/>
+                </a:spcAft>
+              </a:pPr>
+              <a:r>
+                <a:rPr sz="720" i="0" b="0">
+                  <a:solidFill>
+                    <a:srgbClr val="164BCE">
+                      <a:alpha val="100000"/>
+                    </a:srgbClr>
+                  </a:solidFill>
+                  <a:latin typeface="Arial"/>
+                  <a:cs typeface="Arial"/>
+                </a:rPr>
+                <a:t>nucleobase-containing small molecule biosynthetic</a:t>
+              </a:r>
+            </a:p>
+          </p:txBody>
+        </p:sp>
+        <p:sp>
+          <p:nvSpPr>
             <p:cNvPr id="152" name="tx152"/>
             <p:cNvSpPr/>
             <p:nvPr/>
           </p:nvSpPr>
           <p:spPr>
             <a:xfrm>
-              <a:off x="7586079" y="5584989"/>
+              <a:off x="8838807" y="5634366"/>
+              <a:ext cx="319491" cy="65379"/>
+            </a:xfrm>
+            <a:prstGeom prst="rect">
+              <a:avLst/>
+            </a:prstGeom>
+            <a:noFill/>
+          </p:spPr>
+          <p:txBody>
+            <a:bodyPr lIns="0" rIns="0" tIns="0" bIns="0" anchorCtr="1" anchor="ctr" wrap="none"/>
+            <a:lstStyle/>
+            <a:p>
+              <a:pPr algn="l" marL="0" marR="0" indent="0">
+                <a:spcBef>
+                  <a:spcPts val="0"/>
+                </a:spcBef>
+                <a:spcAft>
+                  <a:spcPts val="0"/>
+                </a:spcAft>
+              </a:pPr>
+              <a:r>
+                <a:rPr sz="720" i="0" b="0">
+                  <a:solidFill>
+                    <a:srgbClr val="164BCE">
+                      <a:alpha val="100000"/>
+                    </a:srgbClr>
+                  </a:solidFill>
+                  <a:latin typeface="Arial"/>
+                  <a:cs typeface="Arial"/>
+                </a:rPr>
+                <a:t>process</a:t>
+              </a:r>
+            </a:p>
+          </p:txBody>
+        </p:sp>
+        <p:sp>
+          <p:nvSpPr>
+            <p:cNvPr id="153" name="tx153"/>
+            <p:cNvSpPr/>
+            <p:nvPr/>
+          </p:nvSpPr>
+          <p:spPr>
+            <a:xfrm>
+              <a:off x="7601258" y="5401867"/>
+              <a:ext cx="1557040" cy="65379"/>
+            </a:xfrm>
+            <a:prstGeom prst="rect">
+              <a:avLst/>
+            </a:prstGeom>
+            <a:noFill/>
+          </p:spPr>
+          <p:txBody>
+            <a:bodyPr lIns="0" rIns="0" tIns="0" bIns="0" anchorCtr="1" anchor="ctr" wrap="none"/>
+            <a:lstStyle/>
+            <a:p>
+              <a:pPr algn="l" marL="0" marR="0" indent="0">
+                <a:spcBef>
+                  <a:spcPts val="0"/>
+                </a:spcBef>
+                <a:spcAft>
+                  <a:spcPts val="0"/>
+                </a:spcAft>
+              </a:pPr>
+              <a:r>
+                <a:rPr sz="720" i="0" b="0">
+                  <a:solidFill>
+                    <a:srgbClr val="164BCE">
+                      <a:alpha val="100000"/>
+                    </a:srgbClr>
+                  </a:solidFill>
+                  <a:latin typeface="Arial"/>
+                  <a:cs typeface="Arial"/>
+                </a:rPr>
+                <a:t>monocarboxylic acid catabolic process</a:t>
+              </a:r>
+            </a:p>
+          </p:txBody>
+        </p:sp>
+        <p:sp>
+          <p:nvSpPr>
+            <p:cNvPr id="154" name="tx154"/>
+            <p:cNvSpPr/>
+            <p:nvPr/>
+          </p:nvSpPr>
+          <p:spPr>
+            <a:xfrm>
+              <a:off x="7586079" y="5218746"/>
               <a:ext cx="1572219" cy="65379"/>
             </a:xfrm>
             <a:prstGeom prst="rect">
@@ -9125,14 +9211,57 @@
         </p:sp>
         <p:sp>
           <p:nvSpPr>
-            <p:cNvPr id="153" name="tx153"/>
-            <p:cNvSpPr/>
-            <p:nvPr/>
-          </p:nvSpPr>
-          <p:spPr>
-            <a:xfrm>
-              <a:off x="7109037" y="5352490"/>
-              <a:ext cx="2049261" cy="65379"/>
+            <p:cNvPr id="155" name="tx155"/>
+            <p:cNvSpPr/>
+            <p:nvPr/>
+          </p:nvSpPr>
+          <p:spPr>
+            <a:xfrm>
+              <a:off x="7940958" y="5035624"/>
+              <a:ext cx="1217340" cy="65379"/>
+            </a:xfrm>
+            <a:prstGeom prst="rect">
+              <a:avLst/>
+            </a:prstGeom>
+            <a:noFill/>
+          </p:spPr>
+          <p:txBody>
+            <a:bodyPr lIns="0" rIns="0" tIns="0" bIns="0" anchorCtr="1" anchor="ctr" wrap="none"/>
+            <a:lstStyle/>
+            <a:p>
+              <a:pPr algn="l" marL="0" marR="0" indent="0">
+                <a:spcBef>
+                  <a:spcPts val="0"/>
+                </a:spcBef>
+                <a:spcAft>
+                  <a:spcPts val="0"/>
+                </a:spcAft>
+              </a:pPr>
+              <a:r>
+                <a:rPr sz="720" i="0" b="0">
+                  <a:solidFill>
+                    <a:srgbClr val="159230">
+                      <a:alpha val="100000"/>
+                    </a:srgbClr>
+                  </a:solidFill>
+                  <a:latin typeface="Arial"/>
+                  <a:cs typeface="Arial"/>
+                </a:rPr>
+                <a:t>determination of adult lifespan</a:t>
+              </a:r>
+            </a:p>
+          </p:txBody>
+        </p:sp>
+        <p:sp>
+          <p:nvSpPr>
+            <p:cNvPr id="156" name="tx156"/>
+            <p:cNvSpPr/>
+            <p:nvPr/>
+          </p:nvSpPr>
+          <p:spPr>
+            <a:xfrm>
+              <a:off x="7930808" y="4852503"/>
+              <a:ext cx="1227490" cy="65379"/>
             </a:xfrm>
             <a:prstGeom prst="rect">
               <a:avLst/>
@@ -9161,20 +9290,321 @@
                   <a:latin typeface="Arial"/>
                   <a:cs typeface="Arial"/>
                 </a:rPr>
-                <a:t>nucleobase-containing small molecule biosynthetic</a:t>
+                <a:t>nucleobase metabolic process</a:t>
               </a:r>
             </a:p>
           </p:txBody>
         </p:sp>
         <p:sp>
           <p:nvSpPr>
-            <p:cNvPr id="154" name="tx154"/>
-            <p:cNvSpPr/>
-            <p:nvPr/>
-          </p:nvSpPr>
-          <p:spPr>
-            <a:xfrm>
-              <a:off x="8838807" y="5451245"/>
+            <p:cNvPr id="157" name="tx157"/>
+            <p:cNvSpPr/>
+            <p:nvPr/>
+          </p:nvSpPr>
+          <p:spPr>
+            <a:xfrm>
+              <a:off x="7595955" y="4669381"/>
+              <a:ext cx="1562343" cy="65379"/>
+            </a:xfrm>
+            <a:prstGeom prst="rect">
+              <a:avLst/>
+            </a:prstGeom>
+            <a:noFill/>
+          </p:spPr>
+          <p:txBody>
+            <a:bodyPr lIns="0" rIns="0" tIns="0" bIns="0" anchorCtr="1" anchor="ctr" wrap="none"/>
+            <a:lstStyle/>
+            <a:p>
+              <a:pPr algn="l" marL="0" marR="0" indent="0">
+                <a:spcBef>
+                  <a:spcPts val="0"/>
+                </a:spcBef>
+                <a:spcAft>
+                  <a:spcPts val="0"/>
+                </a:spcAft>
+              </a:pPr>
+              <a:r>
+                <a:rPr sz="720" i="0" b="0">
+                  <a:solidFill>
+                    <a:srgbClr val="111111">
+                      <a:alpha val="100000"/>
+                    </a:srgbClr>
+                  </a:solidFill>
+                  <a:latin typeface="Arial"/>
+                  <a:cs typeface="Arial"/>
+                </a:rPr>
+                <a:t>organophosphate biosynthetic process</a:t>
+              </a:r>
+            </a:p>
+          </p:txBody>
+        </p:sp>
+        <p:sp>
+          <p:nvSpPr>
+            <p:cNvPr id="158" name="tx158"/>
+            <p:cNvSpPr/>
+            <p:nvPr/>
+          </p:nvSpPr>
+          <p:spPr>
+            <a:xfrm>
+              <a:off x="8027186" y="4486260"/>
+              <a:ext cx="1131112" cy="65379"/>
+            </a:xfrm>
+            <a:prstGeom prst="rect">
+              <a:avLst/>
+            </a:prstGeom>
+            <a:noFill/>
+          </p:spPr>
+          <p:txBody>
+            <a:bodyPr lIns="0" rIns="0" tIns="0" bIns="0" anchorCtr="1" anchor="ctr" wrap="none"/>
+            <a:lstStyle/>
+            <a:p>
+              <a:pPr algn="l" marL="0" marR="0" indent="0">
+                <a:spcBef>
+                  <a:spcPts val="0"/>
+                </a:spcBef>
+                <a:spcAft>
+                  <a:spcPts val="0"/>
+                </a:spcAft>
+              </a:pPr>
+              <a:r>
+                <a:rPr sz="720" i="0" b="0">
+                  <a:solidFill>
+                    <a:srgbClr val="164BCE">
+                      <a:alpha val="100000"/>
+                    </a:srgbClr>
+                  </a:solidFill>
+                  <a:latin typeface="Arial"/>
+                  <a:cs typeface="Arial"/>
+                </a:rPr>
+                <a:t>aldehyde metabolic process</a:t>
+              </a:r>
+            </a:p>
+          </p:txBody>
+        </p:sp>
+        <p:sp>
+          <p:nvSpPr>
+            <p:cNvPr id="159" name="tx159"/>
+            <p:cNvSpPr/>
+            <p:nvPr/>
+          </p:nvSpPr>
+          <p:spPr>
+            <a:xfrm>
+              <a:off x="7357845" y="4303138"/>
+              <a:ext cx="1800453" cy="65379"/>
+            </a:xfrm>
+            <a:prstGeom prst="rect">
+              <a:avLst/>
+            </a:prstGeom>
+            <a:noFill/>
+          </p:spPr>
+          <p:txBody>
+            <a:bodyPr lIns="0" rIns="0" tIns="0" bIns="0" anchorCtr="1" anchor="ctr" wrap="none"/>
+            <a:lstStyle/>
+            <a:p>
+              <a:pPr algn="l" marL="0" marR="0" indent="0">
+                <a:spcBef>
+                  <a:spcPts val="0"/>
+                </a:spcBef>
+                <a:spcAft>
+                  <a:spcPts val="0"/>
+                </a:spcAft>
+              </a:pPr>
+              <a:r>
+                <a:rPr sz="720" i="0" b="0">
+                  <a:solidFill>
+                    <a:srgbClr val="164BCE">
+                      <a:alpha val="100000"/>
+                    </a:srgbClr>
+                  </a:solidFill>
+                  <a:latin typeface="Arial"/>
+                  <a:cs typeface="Arial"/>
+                </a:rPr>
+                <a:t>carbohydrate derivative biosynthetic process</a:t>
+              </a:r>
+            </a:p>
+          </p:txBody>
+        </p:sp>
+        <p:sp>
+          <p:nvSpPr>
+            <p:cNvPr id="160" name="tx160"/>
+            <p:cNvSpPr/>
+            <p:nvPr/>
+          </p:nvSpPr>
+          <p:spPr>
+            <a:xfrm>
+              <a:off x="7905571" y="4120017"/>
+              <a:ext cx="1252728" cy="65379"/>
+            </a:xfrm>
+            <a:prstGeom prst="rect">
+              <a:avLst/>
+            </a:prstGeom>
+            <a:noFill/>
+          </p:spPr>
+          <p:txBody>
+            <a:bodyPr lIns="0" rIns="0" tIns="0" bIns="0" anchorCtr="1" anchor="ctr" wrap="none"/>
+            <a:lstStyle/>
+            <a:p>
+              <a:pPr algn="l" marL="0" marR="0" indent="0">
+                <a:spcBef>
+                  <a:spcPts val="0"/>
+                </a:spcBef>
+                <a:spcAft>
+                  <a:spcPts val="0"/>
+                </a:spcAft>
+              </a:pPr>
+              <a:r>
+                <a:rPr sz="720" i="0" b="0">
+                  <a:solidFill>
+                    <a:srgbClr val="164BCE">
+                      <a:alpha val="100000"/>
+                    </a:srgbClr>
+                  </a:solidFill>
+                  <a:latin typeface="Arial"/>
+                  <a:cs typeface="Arial"/>
+                </a:rPr>
+                <a:t>L-amino acid catabolic process</a:t>
+              </a:r>
+            </a:p>
+          </p:txBody>
+        </p:sp>
+        <p:sp>
+          <p:nvSpPr>
+            <p:cNvPr id="161" name="tx161"/>
+            <p:cNvSpPr/>
+            <p:nvPr/>
+          </p:nvSpPr>
+          <p:spPr>
+            <a:xfrm>
+              <a:off x="7728086" y="3936896"/>
+              <a:ext cx="1430213" cy="65379"/>
+            </a:xfrm>
+            <a:prstGeom prst="rect">
+              <a:avLst/>
+            </a:prstGeom>
+            <a:noFill/>
+          </p:spPr>
+          <p:txBody>
+            <a:bodyPr lIns="0" rIns="0" tIns="0" bIns="0" anchorCtr="1" anchor="ctr" wrap="none"/>
+            <a:lstStyle/>
+            <a:p>
+              <a:pPr algn="l" marL="0" marR="0" indent="0">
+                <a:spcBef>
+                  <a:spcPts val="0"/>
+                </a:spcBef>
+                <a:spcAft>
+                  <a:spcPts val="0"/>
+                </a:spcAft>
+              </a:pPr>
+              <a:r>
+                <a:rPr sz="720" i="0" b="0">
+                  <a:solidFill>
+                    <a:srgbClr val="164BCE">
+                      <a:alpha val="100000"/>
+                    </a:srgbClr>
+                  </a:solidFill>
+                  <a:latin typeface="Arial"/>
+                  <a:cs typeface="Arial"/>
+                </a:rPr>
+                <a:t>dicarboxylic acid metabolic process</a:t>
+              </a:r>
+            </a:p>
+          </p:txBody>
+        </p:sp>
+        <p:sp>
+          <p:nvSpPr>
+            <p:cNvPr id="162" name="tx162"/>
+            <p:cNvSpPr/>
+            <p:nvPr/>
+          </p:nvSpPr>
+          <p:spPr>
+            <a:xfrm>
+              <a:off x="7540542" y="3753774"/>
+              <a:ext cx="1617756" cy="65379"/>
+            </a:xfrm>
+            <a:prstGeom prst="rect">
+              <a:avLst/>
+            </a:prstGeom>
+            <a:noFill/>
+          </p:spPr>
+          <p:txBody>
+            <a:bodyPr lIns="0" rIns="0" tIns="0" bIns="0" anchorCtr="1" anchor="ctr" wrap="none"/>
+            <a:lstStyle/>
+            <a:p>
+              <a:pPr algn="l" marL="0" marR="0" indent="0">
+                <a:spcBef>
+                  <a:spcPts val="0"/>
+                </a:spcBef>
+                <a:spcAft>
+                  <a:spcPts val="0"/>
+                </a:spcAft>
+              </a:pPr>
+              <a:r>
+                <a:rPr sz="720" i="0" b="0">
+                  <a:solidFill>
+                    <a:srgbClr val="164BCE">
+                      <a:alpha val="100000"/>
+                    </a:srgbClr>
+                  </a:solidFill>
+                  <a:latin typeface="Arial"/>
+                  <a:cs typeface="Arial"/>
+                </a:rPr>
+                <a:t>water-soluble vitamin metabolic process</a:t>
+              </a:r>
+            </a:p>
+          </p:txBody>
+        </p:sp>
+        <p:sp>
+          <p:nvSpPr>
+            <p:cNvPr id="163" name="tx163"/>
+            <p:cNvSpPr/>
+            <p:nvPr/>
+          </p:nvSpPr>
+          <p:spPr>
+            <a:xfrm>
+              <a:off x="7103825" y="3521275"/>
+              <a:ext cx="2054473" cy="65379"/>
+            </a:xfrm>
+            <a:prstGeom prst="rect">
+              <a:avLst/>
+            </a:prstGeom>
+            <a:noFill/>
+          </p:spPr>
+          <p:txBody>
+            <a:bodyPr lIns="0" rIns="0" tIns="0" bIns="0" anchorCtr="1" anchor="ctr" wrap="none"/>
+            <a:lstStyle/>
+            <a:p>
+              <a:pPr algn="l" marL="0" marR="0" indent="0">
+                <a:spcBef>
+                  <a:spcPts val="0"/>
+                </a:spcBef>
+                <a:spcAft>
+                  <a:spcPts val="0"/>
+                </a:spcAft>
+              </a:pPr>
+              <a:r>
+                <a:rPr sz="720" i="0" b="0">
+                  <a:solidFill>
+                    <a:srgbClr val="164BCE">
+                      <a:alpha val="100000"/>
+                    </a:srgbClr>
+                  </a:solidFill>
+                  <a:latin typeface="Arial"/>
+                  <a:cs typeface="Arial"/>
+                </a:rPr>
+                <a:t>purine ribonucleoside monophosphate biosynthetic</a:t>
+              </a:r>
+            </a:p>
+          </p:txBody>
+        </p:sp>
+        <p:sp>
+          <p:nvSpPr>
+            <p:cNvPr id="164" name="tx164"/>
+            <p:cNvSpPr/>
+            <p:nvPr/>
+          </p:nvSpPr>
+          <p:spPr>
+            <a:xfrm>
+              <a:off x="8838807" y="3620030"/>
               <a:ext cx="319491" cy="65379"/>
             </a:xfrm>
             <a:prstGeom prst="rect">
@@ -9211,480 +9641,7 @@
         </p:sp>
         <p:sp>
           <p:nvSpPr>
-            <p:cNvPr id="155" name="tx155"/>
-            <p:cNvSpPr/>
-            <p:nvPr/>
-          </p:nvSpPr>
-          <p:spPr>
-            <a:xfrm>
-              <a:off x="7601258" y="5218746"/>
-              <a:ext cx="1557040" cy="65379"/>
-            </a:xfrm>
-            <a:prstGeom prst="rect">
-              <a:avLst/>
-            </a:prstGeom>
-            <a:noFill/>
-          </p:spPr>
-          <p:txBody>
-            <a:bodyPr lIns="0" rIns="0" tIns="0" bIns="0" anchorCtr="1" anchor="ctr" wrap="none"/>
-            <a:lstStyle/>
-            <a:p>
-              <a:pPr algn="l" marL="0" marR="0" indent="0">
-                <a:spcBef>
-                  <a:spcPts val="0"/>
-                </a:spcBef>
-                <a:spcAft>
-                  <a:spcPts val="0"/>
-                </a:spcAft>
-              </a:pPr>
-              <a:r>
-                <a:rPr sz="720" i="0" b="0">
-                  <a:solidFill>
-                    <a:srgbClr val="164BCE">
-                      <a:alpha val="100000"/>
-                    </a:srgbClr>
-                  </a:solidFill>
-                  <a:latin typeface="Arial"/>
-                  <a:cs typeface="Arial"/>
-                </a:rPr>
-                <a:t>monocarboxylic acid catabolic process</a:t>
-              </a:r>
-            </a:p>
-          </p:txBody>
-        </p:sp>
-        <p:sp>
-          <p:nvSpPr>
-            <p:cNvPr id="156" name="tx156"/>
-            <p:cNvSpPr/>
-            <p:nvPr/>
-          </p:nvSpPr>
-          <p:spPr>
-            <a:xfrm>
-              <a:off x="7940958" y="5035624"/>
-              <a:ext cx="1217340" cy="65379"/>
-            </a:xfrm>
-            <a:prstGeom prst="rect">
-              <a:avLst/>
-            </a:prstGeom>
-            <a:noFill/>
-          </p:spPr>
-          <p:txBody>
-            <a:bodyPr lIns="0" rIns="0" tIns="0" bIns="0" anchorCtr="1" anchor="ctr" wrap="none"/>
-            <a:lstStyle/>
-            <a:p>
-              <a:pPr algn="l" marL="0" marR="0" indent="0">
-                <a:spcBef>
-                  <a:spcPts val="0"/>
-                </a:spcBef>
-                <a:spcAft>
-                  <a:spcPts val="0"/>
-                </a:spcAft>
-              </a:pPr>
-              <a:r>
-                <a:rPr sz="720" i="0" b="0">
-                  <a:solidFill>
-                    <a:srgbClr val="159230">
-                      <a:alpha val="100000"/>
-                    </a:srgbClr>
-                  </a:solidFill>
-                  <a:latin typeface="Arial"/>
-                  <a:cs typeface="Arial"/>
-                </a:rPr>
-                <a:t>determination of adult lifespan</a:t>
-              </a:r>
-            </a:p>
-          </p:txBody>
-        </p:sp>
-        <p:sp>
-          <p:nvSpPr>
-            <p:cNvPr id="157" name="tx157"/>
-            <p:cNvSpPr/>
-            <p:nvPr/>
-          </p:nvSpPr>
-          <p:spPr>
-            <a:xfrm>
-              <a:off x="7930808" y="4852503"/>
-              <a:ext cx="1227490" cy="65379"/>
-            </a:xfrm>
-            <a:prstGeom prst="rect">
-              <a:avLst/>
-            </a:prstGeom>
-            <a:noFill/>
-          </p:spPr>
-          <p:txBody>
-            <a:bodyPr lIns="0" rIns="0" tIns="0" bIns="0" anchorCtr="1" anchor="ctr" wrap="none"/>
-            <a:lstStyle/>
-            <a:p>
-              <a:pPr algn="l" marL="0" marR="0" indent="0">
-                <a:spcBef>
-                  <a:spcPts val="0"/>
-                </a:spcBef>
-                <a:spcAft>
-                  <a:spcPts val="0"/>
-                </a:spcAft>
-              </a:pPr>
-              <a:r>
-                <a:rPr sz="720" i="0" b="0">
-                  <a:solidFill>
-                    <a:srgbClr val="164BCE">
-                      <a:alpha val="100000"/>
-                    </a:srgbClr>
-                  </a:solidFill>
-                  <a:latin typeface="Arial"/>
-                  <a:cs typeface="Arial"/>
-                </a:rPr>
-                <a:t>nucleobase metabolic process</a:t>
-              </a:r>
-            </a:p>
-          </p:txBody>
-        </p:sp>
-        <p:sp>
-          <p:nvSpPr>
-            <p:cNvPr id="158" name="tx158"/>
-            <p:cNvSpPr/>
-            <p:nvPr/>
-          </p:nvSpPr>
-          <p:spPr>
-            <a:xfrm>
-              <a:off x="7595955" y="4669381"/>
-              <a:ext cx="1562343" cy="65379"/>
-            </a:xfrm>
-            <a:prstGeom prst="rect">
-              <a:avLst/>
-            </a:prstGeom>
-            <a:noFill/>
-          </p:spPr>
-          <p:txBody>
-            <a:bodyPr lIns="0" rIns="0" tIns="0" bIns="0" anchorCtr="1" anchor="ctr" wrap="none"/>
-            <a:lstStyle/>
-            <a:p>
-              <a:pPr algn="l" marL="0" marR="0" indent="0">
-                <a:spcBef>
-                  <a:spcPts val="0"/>
-                </a:spcBef>
-                <a:spcAft>
-                  <a:spcPts val="0"/>
-                </a:spcAft>
-              </a:pPr>
-              <a:r>
-                <a:rPr sz="720" i="0" b="0">
-                  <a:solidFill>
-                    <a:srgbClr val="111111">
-                      <a:alpha val="100000"/>
-                    </a:srgbClr>
-                  </a:solidFill>
-                  <a:latin typeface="Arial"/>
-                  <a:cs typeface="Arial"/>
-                </a:rPr>
-                <a:t>organophosphate biosynthetic process</a:t>
-              </a:r>
-            </a:p>
-          </p:txBody>
-        </p:sp>
-        <p:sp>
-          <p:nvSpPr>
-            <p:cNvPr id="159" name="tx159"/>
-            <p:cNvSpPr/>
-            <p:nvPr/>
-          </p:nvSpPr>
-          <p:spPr>
-            <a:xfrm>
-              <a:off x="8027186" y="4486260"/>
-              <a:ext cx="1131112" cy="65379"/>
-            </a:xfrm>
-            <a:prstGeom prst="rect">
-              <a:avLst/>
-            </a:prstGeom>
-            <a:noFill/>
-          </p:spPr>
-          <p:txBody>
-            <a:bodyPr lIns="0" rIns="0" tIns="0" bIns="0" anchorCtr="1" anchor="ctr" wrap="none"/>
-            <a:lstStyle/>
-            <a:p>
-              <a:pPr algn="l" marL="0" marR="0" indent="0">
-                <a:spcBef>
-                  <a:spcPts val="0"/>
-                </a:spcBef>
-                <a:spcAft>
-                  <a:spcPts val="0"/>
-                </a:spcAft>
-              </a:pPr>
-              <a:r>
-                <a:rPr sz="720" i="0" b="0">
-                  <a:solidFill>
-                    <a:srgbClr val="164BCE">
-                      <a:alpha val="100000"/>
-                    </a:srgbClr>
-                  </a:solidFill>
-                  <a:latin typeface="Arial"/>
-                  <a:cs typeface="Arial"/>
-                </a:rPr>
-                <a:t>aldehyde metabolic process</a:t>
-              </a:r>
-            </a:p>
-          </p:txBody>
-        </p:sp>
-        <p:sp>
-          <p:nvSpPr>
-            <p:cNvPr id="160" name="tx160"/>
-            <p:cNvSpPr/>
-            <p:nvPr/>
-          </p:nvSpPr>
-          <p:spPr>
-            <a:xfrm>
-              <a:off x="7357845" y="4303138"/>
-              <a:ext cx="1800453" cy="65379"/>
-            </a:xfrm>
-            <a:prstGeom prst="rect">
-              <a:avLst/>
-            </a:prstGeom>
-            <a:noFill/>
-          </p:spPr>
-          <p:txBody>
-            <a:bodyPr lIns="0" rIns="0" tIns="0" bIns="0" anchorCtr="1" anchor="ctr" wrap="none"/>
-            <a:lstStyle/>
-            <a:p>
-              <a:pPr algn="l" marL="0" marR="0" indent="0">
-                <a:spcBef>
-                  <a:spcPts val="0"/>
-                </a:spcBef>
-                <a:spcAft>
-                  <a:spcPts val="0"/>
-                </a:spcAft>
-              </a:pPr>
-              <a:r>
-                <a:rPr sz="720" i="0" b="0">
-                  <a:solidFill>
-                    <a:srgbClr val="164BCE">
-                      <a:alpha val="100000"/>
-                    </a:srgbClr>
-                  </a:solidFill>
-                  <a:latin typeface="Arial"/>
-                  <a:cs typeface="Arial"/>
-                </a:rPr>
-                <a:t>carbohydrate derivative biosynthetic process</a:t>
-              </a:r>
-            </a:p>
-          </p:txBody>
-        </p:sp>
-        <p:sp>
-          <p:nvSpPr>
-            <p:cNvPr id="161" name="tx161"/>
-            <p:cNvSpPr/>
-            <p:nvPr/>
-          </p:nvSpPr>
-          <p:spPr>
-            <a:xfrm>
-              <a:off x="7905571" y="4120017"/>
-              <a:ext cx="1252728" cy="65379"/>
-            </a:xfrm>
-            <a:prstGeom prst="rect">
-              <a:avLst/>
-            </a:prstGeom>
-            <a:noFill/>
-          </p:spPr>
-          <p:txBody>
-            <a:bodyPr lIns="0" rIns="0" tIns="0" bIns="0" anchorCtr="1" anchor="ctr" wrap="none"/>
-            <a:lstStyle/>
-            <a:p>
-              <a:pPr algn="l" marL="0" marR="0" indent="0">
-                <a:spcBef>
-                  <a:spcPts val="0"/>
-                </a:spcBef>
-                <a:spcAft>
-                  <a:spcPts val="0"/>
-                </a:spcAft>
-              </a:pPr>
-              <a:r>
-                <a:rPr sz="720" i="0" b="0">
-                  <a:solidFill>
-                    <a:srgbClr val="164BCE">
-                      <a:alpha val="100000"/>
-                    </a:srgbClr>
-                  </a:solidFill>
-                  <a:latin typeface="Arial"/>
-                  <a:cs typeface="Arial"/>
-                </a:rPr>
-                <a:t>L-amino acid catabolic process</a:t>
-              </a:r>
-            </a:p>
-          </p:txBody>
-        </p:sp>
-        <p:sp>
-          <p:nvSpPr>
-            <p:cNvPr id="162" name="tx162"/>
-            <p:cNvSpPr/>
-            <p:nvPr/>
-          </p:nvSpPr>
-          <p:spPr>
-            <a:xfrm>
-              <a:off x="7728086" y="3936896"/>
-              <a:ext cx="1430213" cy="65379"/>
-            </a:xfrm>
-            <a:prstGeom prst="rect">
-              <a:avLst/>
-            </a:prstGeom>
-            <a:noFill/>
-          </p:spPr>
-          <p:txBody>
-            <a:bodyPr lIns="0" rIns="0" tIns="0" bIns="0" anchorCtr="1" anchor="ctr" wrap="none"/>
-            <a:lstStyle/>
-            <a:p>
-              <a:pPr algn="l" marL="0" marR="0" indent="0">
-                <a:spcBef>
-                  <a:spcPts val="0"/>
-                </a:spcBef>
-                <a:spcAft>
-                  <a:spcPts val="0"/>
-                </a:spcAft>
-              </a:pPr>
-              <a:r>
-                <a:rPr sz="720" i="0" b="0">
-                  <a:solidFill>
-                    <a:srgbClr val="164BCE">
-                      <a:alpha val="100000"/>
-                    </a:srgbClr>
-                  </a:solidFill>
-                  <a:latin typeface="Arial"/>
-                  <a:cs typeface="Arial"/>
-                </a:rPr>
-                <a:t>dicarboxylic acid metabolic process</a:t>
-              </a:r>
-            </a:p>
-          </p:txBody>
-        </p:sp>
-        <p:sp>
-          <p:nvSpPr>
-            <p:cNvPr id="163" name="tx163"/>
-            <p:cNvSpPr/>
-            <p:nvPr/>
-          </p:nvSpPr>
-          <p:spPr>
-            <a:xfrm>
-              <a:off x="7540542" y="3753774"/>
-              <a:ext cx="1617756" cy="65379"/>
-            </a:xfrm>
-            <a:prstGeom prst="rect">
-              <a:avLst/>
-            </a:prstGeom>
-            <a:noFill/>
-          </p:spPr>
-          <p:txBody>
-            <a:bodyPr lIns="0" rIns="0" tIns="0" bIns="0" anchorCtr="1" anchor="ctr" wrap="none"/>
-            <a:lstStyle/>
-            <a:p>
-              <a:pPr algn="l" marL="0" marR="0" indent="0">
-                <a:spcBef>
-                  <a:spcPts val="0"/>
-                </a:spcBef>
-                <a:spcAft>
-                  <a:spcPts val="0"/>
-                </a:spcAft>
-              </a:pPr>
-              <a:r>
-                <a:rPr sz="720" i="0" b="0">
-                  <a:solidFill>
-                    <a:srgbClr val="164BCE">
-                      <a:alpha val="100000"/>
-                    </a:srgbClr>
-                  </a:solidFill>
-                  <a:latin typeface="Arial"/>
-                  <a:cs typeface="Arial"/>
-                </a:rPr>
-                <a:t>water-soluble vitamin metabolic process</a:t>
-              </a:r>
-            </a:p>
-          </p:txBody>
-        </p:sp>
-        <p:sp>
-          <p:nvSpPr>
-            <p:cNvPr id="164" name="tx164"/>
-            <p:cNvSpPr/>
-            <p:nvPr/>
-          </p:nvSpPr>
-          <p:spPr>
-            <a:xfrm>
-              <a:off x="7103825" y="3521275"/>
-              <a:ext cx="2054473" cy="65379"/>
-            </a:xfrm>
-            <a:prstGeom prst="rect">
-              <a:avLst/>
-            </a:prstGeom>
-            <a:noFill/>
-          </p:spPr>
-          <p:txBody>
-            <a:bodyPr lIns="0" rIns="0" tIns="0" bIns="0" anchorCtr="1" anchor="ctr" wrap="none"/>
-            <a:lstStyle/>
-            <a:p>
-              <a:pPr algn="l" marL="0" marR="0" indent="0">
-                <a:spcBef>
-                  <a:spcPts val="0"/>
-                </a:spcBef>
-                <a:spcAft>
-                  <a:spcPts val="0"/>
-                </a:spcAft>
-              </a:pPr>
-              <a:r>
-                <a:rPr sz="720" i="0" b="0">
-                  <a:solidFill>
-                    <a:srgbClr val="164BCE">
-                      <a:alpha val="100000"/>
-                    </a:srgbClr>
-                  </a:solidFill>
-                  <a:latin typeface="Arial"/>
-                  <a:cs typeface="Arial"/>
-                </a:rPr>
-                <a:t>purine ribonucleoside monophosphate biosynthetic</a:t>
-              </a:r>
-            </a:p>
-          </p:txBody>
-        </p:sp>
-        <p:sp>
-          <p:nvSpPr>
             <p:cNvPr id="165" name="tx165"/>
-            <p:cNvSpPr/>
-            <p:nvPr/>
-          </p:nvSpPr>
-          <p:spPr>
-            <a:xfrm>
-              <a:off x="8838807" y="3620030"/>
-              <a:ext cx="319491" cy="65379"/>
-            </a:xfrm>
-            <a:prstGeom prst="rect">
-              <a:avLst/>
-            </a:prstGeom>
-            <a:noFill/>
-          </p:spPr>
-          <p:txBody>
-            <a:bodyPr lIns="0" rIns="0" tIns="0" bIns="0" anchorCtr="1" anchor="ctr" wrap="none"/>
-            <a:lstStyle/>
-            <a:p>
-              <a:pPr algn="l" marL="0" marR="0" indent="0">
-                <a:spcBef>
-                  <a:spcPts val="0"/>
-                </a:spcBef>
-                <a:spcAft>
-                  <a:spcPts val="0"/>
-                </a:spcAft>
-              </a:pPr>
-              <a:r>
-                <a:rPr sz="720" i="0" b="0">
-                  <a:solidFill>
-                    <a:srgbClr val="164BCE">
-                      <a:alpha val="100000"/>
-                    </a:srgbClr>
-                  </a:solidFill>
-                  <a:latin typeface="Arial"/>
-                  <a:cs typeface="Arial"/>
-                </a:rPr>
-                <a:t>process</a:t>
-              </a:r>
-            </a:p>
-          </p:txBody>
-        </p:sp>
-        <p:sp>
-          <p:nvSpPr>
-            <p:cNvPr id="166" name="tx166"/>
             <p:cNvSpPr/>
             <p:nvPr/>
           </p:nvSpPr>
@@ -9727,7 +9684,7 @@
         </p:sp>
         <p:sp>
           <p:nvSpPr>
-            <p:cNvPr id="167" name="tx167"/>
+            <p:cNvPr id="166" name="tx166"/>
             <p:cNvSpPr/>
             <p:nvPr/>
           </p:nvSpPr>
@@ -9770,7 +9727,7 @@
         </p:sp>
         <p:sp>
           <p:nvSpPr>
-            <p:cNvPr id="168" name="tx168"/>
+            <p:cNvPr id="167" name="tx167"/>
             <p:cNvSpPr/>
             <p:nvPr/>
           </p:nvSpPr>
@@ -9813,7 +9770,7 @@
         </p:sp>
         <p:sp>
           <p:nvSpPr>
-            <p:cNvPr id="169" name="tx169"/>
+            <p:cNvPr id="168" name="tx168"/>
             <p:cNvSpPr/>
             <p:nvPr/>
           </p:nvSpPr>
@@ -9856,7 +9813,7 @@
         </p:sp>
         <p:sp>
           <p:nvSpPr>
-            <p:cNvPr id="170" name="tx170"/>
+            <p:cNvPr id="169" name="tx169"/>
             <p:cNvSpPr/>
             <p:nvPr/>
           </p:nvSpPr>
@@ -9899,7 +9856,7 @@
         </p:sp>
         <p:sp>
           <p:nvSpPr>
-            <p:cNvPr id="171" name="tx171"/>
+            <p:cNvPr id="170" name="tx170"/>
             <p:cNvSpPr/>
             <p:nvPr/>
           </p:nvSpPr>
@@ -9942,7 +9899,7 @@
         </p:sp>
         <p:sp>
           <p:nvSpPr>
-            <p:cNvPr id="172" name="tx172"/>
+            <p:cNvPr id="171" name="tx171"/>
             <p:cNvSpPr/>
             <p:nvPr/>
           </p:nvSpPr>
@@ -9985,7 +9942,7 @@
         </p:sp>
         <p:sp>
           <p:nvSpPr>
-            <p:cNvPr id="173" name="tx173"/>
+            <p:cNvPr id="172" name="tx172"/>
             <p:cNvSpPr/>
             <p:nvPr/>
           </p:nvSpPr>
@@ -10028,7 +9985,7 @@
         </p:sp>
         <p:sp>
           <p:nvSpPr>
-            <p:cNvPr id="174" name="tx174"/>
+            <p:cNvPr id="173" name="tx173"/>
             <p:cNvSpPr/>
             <p:nvPr/>
           </p:nvSpPr>
@@ -10071,7 +10028,7 @@
         </p:sp>
         <p:sp>
           <p:nvSpPr>
-            <p:cNvPr id="175" name="tx175"/>
+            <p:cNvPr id="174" name="tx174"/>
             <p:cNvSpPr/>
             <p:nvPr/>
           </p:nvSpPr>
@@ -10114,7 +10071,7 @@
         </p:sp>
         <p:sp>
           <p:nvSpPr>
-            <p:cNvPr id="176" name="tx176"/>
+            <p:cNvPr id="175" name="tx175"/>
             <p:cNvSpPr/>
             <p:nvPr/>
           </p:nvSpPr>
@@ -10157,7 +10114,7 @@
         </p:sp>
         <p:sp>
           <p:nvSpPr>
-            <p:cNvPr id="177" name="tx177"/>
+            <p:cNvPr id="176" name="tx176"/>
             <p:cNvSpPr/>
             <p:nvPr/>
           </p:nvSpPr>
@@ -10200,7 +10157,7 @@
         </p:sp>
         <p:sp>
           <p:nvSpPr>
-            <p:cNvPr id="178" name="tx178"/>
+            <p:cNvPr id="177" name="tx177"/>
             <p:cNvSpPr/>
             <p:nvPr/>
           </p:nvSpPr>
@@ -10243,7 +10200,7 @@
         </p:sp>
         <p:sp>
           <p:nvSpPr>
-            <p:cNvPr id="179" name="tx179"/>
+            <p:cNvPr id="178" name="tx178"/>
             <p:cNvSpPr/>
             <p:nvPr/>
           </p:nvSpPr>
@@ -10286,7 +10243,7 @@
         </p:sp>
         <p:sp>
           <p:nvSpPr>
-            <p:cNvPr id="180" name="tx180"/>
+            <p:cNvPr id="179" name="tx179"/>
             <p:cNvSpPr/>
             <p:nvPr/>
           </p:nvSpPr>
@@ -10329,7 +10286,7 @@
         </p:sp>
         <p:sp>
           <p:nvSpPr>
-            <p:cNvPr id="181" name="tx181"/>
+            <p:cNvPr id="180" name="tx180"/>
             <p:cNvSpPr/>
             <p:nvPr/>
           </p:nvSpPr>
@@ -10372,7 +10329,7 @@
         </p:sp>
         <p:sp>
           <p:nvSpPr>
-            <p:cNvPr id="182" name="tx182"/>
+            <p:cNvPr id="181" name="tx181"/>
             <p:cNvSpPr/>
             <p:nvPr/>
           </p:nvSpPr>
@@ -10415,7 +10372,7 @@
         </p:sp>
         <p:sp>
           <p:nvSpPr>
-            <p:cNvPr id="183" name="tx183"/>
+            <p:cNvPr id="182" name="tx182"/>
             <p:cNvSpPr/>
             <p:nvPr/>
           </p:nvSpPr>
@@ -10458,7 +10415,7 @@
         </p:sp>
         <p:sp>
           <p:nvSpPr>
-            <p:cNvPr id="184" name="tx184"/>
+            <p:cNvPr id="183" name="tx183"/>
             <p:cNvSpPr/>
             <p:nvPr/>
           </p:nvSpPr>
@@ -10501,7 +10458,7 @@
         </p:sp>
         <p:sp>
           <p:nvSpPr>
-            <p:cNvPr id="185" name="tx185"/>
+            <p:cNvPr id="184" name="tx184"/>
             <p:cNvSpPr/>
             <p:nvPr/>
           </p:nvSpPr>
@@ -10544,7 +10501,7 @@
         </p:sp>
         <p:sp>
           <p:nvSpPr>
-            <p:cNvPr id="186" name="tx186"/>
+            <p:cNvPr id="185" name="tx185"/>
             <p:cNvSpPr/>
             <p:nvPr/>
           </p:nvSpPr>
@@ -10587,7 +10544,7 @@
         </p:sp>
         <p:sp>
           <p:nvSpPr>
-            <p:cNvPr id="187" name="tx187"/>
+            <p:cNvPr id="186" name="tx186"/>
             <p:cNvSpPr/>
             <p:nvPr/>
           </p:nvSpPr>
@@ -10630,7 +10587,7 @@
         </p:sp>
         <p:sp>
           <p:nvSpPr>
-            <p:cNvPr id="188" name="tx188"/>
+            <p:cNvPr id="187" name="tx187"/>
             <p:cNvSpPr/>
             <p:nvPr/>
           </p:nvSpPr>
@@ -10673,7 +10630,7 @@
         </p:sp>
         <p:sp>
           <p:nvSpPr>
-            <p:cNvPr id="189" name="tx189"/>
+            <p:cNvPr id="188" name="tx188"/>
             <p:cNvSpPr/>
             <p:nvPr/>
           </p:nvSpPr>
@@ -10716,7 +10673,7 @@
         </p:sp>
         <p:sp>
           <p:nvSpPr>
-            <p:cNvPr id="190" name="pt190"/>
+            <p:cNvPr id="189" name="pt189"/>
             <p:cNvSpPr/>
             <p:nvPr/>
           </p:nvSpPr>
@@ -10751,7 +10708,7 @@
         </p:sp>
         <p:sp>
           <p:nvSpPr>
-            <p:cNvPr id="191" name="pt191"/>
+            <p:cNvPr id="190" name="pt190"/>
             <p:cNvSpPr/>
             <p:nvPr/>
           </p:nvSpPr>
@@ -10786,7 +10743,7 @@
         </p:sp>
         <p:sp>
           <p:nvSpPr>
-            <p:cNvPr id="192" name="pt192"/>
+            <p:cNvPr id="191" name="pt191"/>
             <p:cNvSpPr/>
             <p:nvPr/>
           </p:nvSpPr>
@@ -10821,7 +10778,7 @@
         </p:sp>
         <p:sp>
           <p:nvSpPr>
-            <p:cNvPr id="193" name="pt193"/>
+            <p:cNvPr id="192" name="pt192"/>
             <p:cNvSpPr/>
             <p:nvPr/>
           </p:nvSpPr>
@@ -10856,7 +10813,7 @@
         </p:sp>
         <p:sp>
           <p:nvSpPr>
-            <p:cNvPr id="194" name="tx194"/>
+            <p:cNvPr id="193" name="tx193"/>
             <p:cNvSpPr/>
             <p:nvPr/>
           </p:nvSpPr>
@@ -10899,7 +10856,7 @@
         </p:sp>
         <p:sp>
           <p:nvSpPr>
-            <p:cNvPr id="195" name="tx195"/>
+            <p:cNvPr id="194" name="tx194"/>
             <p:cNvSpPr/>
             <p:nvPr/>
           </p:nvSpPr>
@@ -10942,7 +10899,7 @@
         </p:sp>
         <p:sp>
           <p:nvSpPr>
-            <p:cNvPr id="196" name="tx196"/>
+            <p:cNvPr id="195" name="tx195"/>
             <p:cNvSpPr/>
             <p:nvPr/>
           </p:nvSpPr>
@@ -10985,7 +10942,7 @@
         </p:sp>
         <p:sp>
           <p:nvSpPr>
-            <p:cNvPr id="197" name="tx197"/>
+            <p:cNvPr id="196" name="tx196"/>
             <p:cNvSpPr/>
             <p:nvPr/>
           </p:nvSpPr>
@@ -11028,7 +10985,7 @@
         </p:sp>
         <p:sp>
           <p:nvSpPr>
-            <p:cNvPr id="198" name="tx198"/>
+            <p:cNvPr id="197" name="tx197"/>
             <p:cNvSpPr/>
             <p:nvPr/>
           </p:nvSpPr>
@@ -11071,7 +11028,7 @@
         </p:sp>
         <p:sp>
           <p:nvSpPr>
-            <p:cNvPr id="199" name="pt199"/>
+            <p:cNvPr id="198" name="pt198"/>
             <p:cNvSpPr/>
             <p:nvPr/>
           </p:nvSpPr>
@@ -11106,7 +11063,7 @@
         </p:sp>
         <p:sp>
           <p:nvSpPr>
-            <p:cNvPr id="200" name="pt200"/>
+            <p:cNvPr id="199" name="pt199"/>
             <p:cNvSpPr/>
             <p:nvPr/>
           </p:nvSpPr>
@@ -11141,7 +11098,7 @@
         </p:sp>
         <p:sp>
           <p:nvSpPr>
-            <p:cNvPr id="201" name="pt201"/>
+            <p:cNvPr id="200" name="pt200"/>
             <p:cNvSpPr/>
             <p:nvPr/>
           </p:nvSpPr>
@@ -11176,7 +11133,7 @@
         </p:sp>
         <p:sp>
           <p:nvSpPr>
-            <p:cNvPr id="202" name="pt202"/>
+            <p:cNvPr id="201" name="pt201"/>
             <p:cNvSpPr/>
             <p:nvPr/>
           </p:nvSpPr>
@@ -11211,7 +11168,7 @@
         </p:sp>
         <p:sp>
           <p:nvSpPr>
-            <p:cNvPr id="203" name="tx203"/>
+            <p:cNvPr id="202" name="tx202"/>
             <p:cNvSpPr/>
             <p:nvPr/>
           </p:nvSpPr>
@@ -11254,7 +11211,7 @@
         </p:sp>
         <p:sp>
           <p:nvSpPr>
-            <p:cNvPr id="204" name="tx204"/>
+            <p:cNvPr id="203" name="tx203"/>
             <p:cNvSpPr/>
             <p:nvPr/>
           </p:nvSpPr>
@@ -11297,7 +11254,7 @@
         </p:sp>
         <p:sp>
           <p:nvSpPr>
-            <p:cNvPr id="205" name="tx205"/>
+            <p:cNvPr id="204" name="tx204"/>
             <p:cNvSpPr/>
             <p:nvPr/>
           </p:nvSpPr>
@@ -11340,7 +11297,7 @@
         </p:sp>
         <p:sp>
           <p:nvSpPr>
-            <p:cNvPr id="206" name="tx206"/>
+            <p:cNvPr id="205" name="tx205"/>
             <p:cNvSpPr/>
             <p:nvPr/>
           </p:nvSpPr>
